--- a/public/fun/cards/creative/creative-10.pptx
+++ b/public/fun/cards/creative/creative-10.pptx
@@ -3085,7 +3085,7 @@
     <p:bg>
       <p:bgPr>
         <a:solidFill>
-          <a:srgbClr val="FBF8F2"/>
+          <a:srgbClr val="E6EAF2"/>
         </a:solidFill>
         <a:effectLst/>
       </p:bgPr>
@@ -3099,1052 +3099,14 @@
       <p:grpSpPr/>
       <p:sp>
         <p:nvSpPr>
-          <p:cNvPr id="2" name="Oval 1"/>
+          <p:cNvPr id="2" name="Freeform 1"/>
           <p:cNvSpPr/>
           <p:nvPr/>
         </p:nvSpPr>
         <p:spPr>
           <a:xfrm>
-            <a:off x="2462400" y="158400"/>
-            <a:ext cx="43200" cy="43200"/>
-          </a:xfrm>
-          <a:prstGeom prst="ellipse">
-            <a:avLst/>
-          </a:prstGeom>
-          <a:solidFill>
-            <a:srgbClr val="3B9177">
-              <a:alpha val="70000"/>
-            </a:srgbClr>
-          </a:solidFill>
-          <a:ln>
-            <a:noFill/>
-          </a:ln>
-        </p:spPr>
-        <p:txBody>
-          <a:bodyPr rtlCol="0" anchor="ctr"/>
-          <a:lstStyle/>
-          <a:p>
-            <a:pPr algn="ctr"/>
-          </a:p>
-        </p:txBody>
-      </p:sp>
-      <p:sp>
-        <p:nvSpPr>
-          <p:cNvPr id="3" name="Oval 2"/>
-          <p:cNvSpPr/>
-          <p:nvPr/>
-        </p:nvSpPr>
-        <p:spPr>
-          <a:xfrm>
-            <a:off x="2462400" y="266400"/>
-            <a:ext cx="43200" cy="43200"/>
-          </a:xfrm>
-          <a:prstGeom prst="ellipse">
-            <a:avLst/>
-          </a:prstGeom>
-          <a:solidFill>
-            <a:srgbClr val="3B9177">
-              <a:alpha val="57999"/>
-            </a:srgbClr>
-          </a:solidFill>
-          <a:ln>
-            <a:noFill/>
-          </a:ln>
-        </p:spPr>
-        <p:txBody>
-          <a:bodyPr rtlCol="0" anchor="ctr"/>
-          <a:lstStyle/>
-          <a:p>
-            <a:pPr algn="ctr"/>
-          </a:p>
-        </p:txBody>
-      </p:sp>
-      <p:sp>
-        <p:nvSpPr>
-          <p:cNvPr id="4" name="Oval 3"/>
-          <p:cNvSpPr/>
-          <p:nvPr/>
-        </p:nvSpPr>
-        <p:spPr>
-          <a:xfrm>
-            <a:off x="2462400" y="374400"/>
-            <a:ext cx="43200" cy="43200"/>
-          </a:xfrm>
-          <a:prstGeom prst="ellipse">
-            <a:avLst/>
-          </a:prstGeom>
-          <a:solidFill>
-            <a:srgbClr val="3B9177">
-              <a:alpha val="46000"/>
-            </a:srgbClr>
-          </a:solidFill>
-          <a:ln>
-            <a:noFill/>
-          </a:ln>
-        </p:spPr>
-        <p:txBody>
-          <a:bodyPr rtlCol="0" anchor="ctr"/>
-          <a:lstStyle/>
-          <a:p>
-            <a:pPr algn="ctr"/>
-          </a:p>
-        </p:txBody>
-      </p:sp>
-      <p:sp>
-        <p:nvSpPr>
-          <p:cNvPr id="5" name="Oval 4"/>
-          <p:cNvSpPr/>
-          <p:nvPr/>
-        </p:nvSpPr>
-        <p:spPr>
-          <a:xfrm>
-            <a:off x="2462400" y="482400"/>
-            <a:ext cx="43200" cy="43200"/>
-          </a:xfrm>
-          <a:prstGeom prst="ellipse">
-            <a:avLst/>
-          </a:prstGeom>
-          <a:solidFill>
-            <a:srgbClr val="3B9177">
-              <a:alpha val="34000"/>
-            </a:srgbClr>
-          </a:solidFill>
-          <a:ln>
-            <a:noFill/>
-          </a:ln>
-        </p:spPr>
-        <p:txBody>
-          <a:bodyPr rtlCol="0" anchor="ctr"/>
-          <a:lstStyle/>
-          <a:p>
-            <a:pPr algn="ctr"/>
-          </a:p>
-        </p:txBody>
-      </p:sp>
-      <p:sp>
-        <p:nvSpPr>
-          <p:cNvPr id="6" name="Oval 5"/>
-          <p:cNvSpPr/>
-          <p:nvPr/>
-        </p:nvSpPr>
-        <p:spPr>
-          <a:xfrm>
-            <a:off x="2570400" y="158400"/>
-            <a:ext cx="43200" cy="43200"/>
-          </a:xfrm>
-          <a:prstGeom prst="ellipse">
-            <a:avLst/>
-          </a:prstGeom>
-          <a:solidFill>
-            <a:srgbClr val="3B9177">
-              <a:alpha val="70000"/>
-            </a:srgbClr>
-          </a:solidFill>
-          <a:ln>
-            <a:noFill/>
-          </a:ln>
-        </p:spPr>
-        <p:txBody>
-          <a:bodyPr rtlCol="0" anchor="ctr"/>
-          <a:lstStyle/>
-          <a:p>
-            <a:pPr algn="ctr"/>
-          </a:p>
-        </p:txBody>
-      </p:sp>
-      <p:sp>
-        <p:nvSpPr>
-          <p:cNvPr id="7" name="Oval 6"/>
-          <p:cNvSpPr/>
-          <p:nvPr/>
-        </p:nvSpPr>
-        <p:spPr>
-          <a:xfrm>
-            <a:off x="2570400" y="266400"/>
-            <a:ext cx="43200" cy="43200"/>
-          </a:xfrm>
-          <a:prstGeom prst="ellipse">
-            <a:avLst/>
-          </a:prstGeom>
-          <a:solidFill>
-            <a:srgbClr val="3B9177">
-              <a:alpha val="57999"/>
-            </a:srgbClr>
-          </a:solidFill>
-          <a:ln>
-            <a:noFill/>
-          </a:ln>
-        </p:spPr>
-        <p:txBody>
-          <a:bodyPr rtlCol="0" anchor="ctr"/>
-          <a:lstStyle/>
-          <a:p>
-            <a:pPr algn="ctr"/>
-          </a:p>
-        </p:txBody>
-      </p:sp>
-      <p:sp>
-        <p:nvSpPr>
-          <p:cNvPr id="8" name="Oval 7"/>
-          <p:cNvSpPr/>
-          <p:nvPr/>
-        </p:nvSpPr>
-        <p:spPr>
-          <a:xfrm>
-            <a:off x="2570400" y="374400"/>
-            <a:ext cx="43200" cy="43200"/>
-          </a:xfrm>
-          <a:prstGeom prst="ellipse">
-            <a:avLst/>
-          </a:prstGeom>
-          <a:solidFill>
-            <a:srgbClr val="3B9177">
-              <a:alpha val="46000"/>
-            </a:srgbClr>
-          </a:solidFill>
-          <a:ln>
-            <a:noFill/>
-          </a:ln>
-        </p:spPr>
-        <p:txBody>
-          <a:bodyPr rtlCol="0" anchor="ctr"/>
-          <a:lstStyle/>
-          <a:p>
-            <a:pPr algn="ctr"/>
-          </a:p>
-        </p:txBody>
-      </p:sp>
-      <p:sp>
-        <p:nvSpPr>
-          <p:cNvPr id="9" name="Oval 8"/>
-          <p:cNvSpPr/>
-          <p:nvPr/>
-        </p:nvSpPr>
-        <p:spPr>
-          <a:xfrm>
-            <a:off x="2570400" y="482400"/>
-            <a:ext cx="43200" cy="43200"/>
-          </a:xfrm>
-          <a:prstGeom prst="ellipse">
-            <a:avLst/>
-          </a:prstGeom>
-          <a:solidFill>
-            <a:srgbClr val="3B9177">
-              <a:alpha val="34000"/>
-            </a:srgbClr>
-          </a:solidFill>
-          <a:ln>
-            <a:noFill/>
-          </a:ln>
-        </p:spPr>
-        <p:txBody>
-          <a:bodyPr rtlCol="0" anchor="ctr"/>
-          <a:lstStyle/>
-          <a:p>
-            <a:pPr algn="ctr"/>
-          </a:p>
-        </p:txBody>
-      </p:sp>
-      <p:sp>
-        <p:nvSpPr>
-          <p:cNvPr id="10" name="Oval 9"/>
-          <p:cNvSpPr/>
-          <p:nvPr/>
-        </p:nvSpPr>
-        <p:spPr>
-          <a:xfrm>
-            <a:off x="2678400" y="158400"/>
-            <a:ext cx="43200" cy="43200"/>
-          </a:xfrm>
-          <a:prstGeom prst="ellipse">
-            <a:avLst/>
-          </a:prstGeom>
-          <a:solidFill>
-            <a:srgbClr val="3B9177">
-              <a:alpha val="70000"/>
-            </a:srgbClr>
-          </a:solidFill>
-          <a:ln>
-            <a:noFill/>
-          </a:ln>
-        </p:spPr>
-        <p:txBody>
-          <a:bodyPr rtlCol="0" anchor="ctr"/>
-          <a:lstStyle/>
-          <a:p>
-            <a:pPr algn="ctr"/>
-          </a:p>
-        </p:txBody>
-      </p:sp>
-      <p:sp>
-        <p:nvSpPr>
-          <p:cNvPr id="11" name="Oval 10"/>
-          <p:cNvSpPr/>
-          <p:nvPr/>
-        </p:nvSpPr>
-        <p:spPr>
-          <a:xfrm>
-            <a:off x="2678400" y="266400"/>
-            <a:ext cx="43200" cy="43200"/>
-          </a:xfrm>
-          <a:prstGeom prst="ellipse">
-            <a:avLst/>
-          </a:prstGeom>
-          <a:solidFill>
-            <a:srgbClr val="3B9177">
-              <a:alpha val="57999"/>
-            </a:srgbClr>
-          </a:solidFill>
-          <a:ln>
-            <a:noFill/>
-          </a:ln>
-        </p:spPr>
-        <p:txBody>
-          <a:bodyPr rtlCol="0" anchor="ctr"/>
-          <a:lstStyle/>
-          <a:p>
-            <a:pPr algn="ctr"/>
-          </a:p>
-        </p:txBody>
-      </p:sp>
-      <p:sp>
-        <p:nvSpPr>
-          <p:cNvPr id="12" name="Oval 11"/>
-          <p:cNvSpPr/>
-          <p:nvPr/>
-        </p:nvSpPr>
-        <p:spPr>
-          <a:xfrm>
-            <a:off x="2678400" y="374400"/>
-            <a:ext cx="43200" cy="43200"/>
-          </a:xfrm>
-          <a:prstGeom prst="ellipse">
-            <a:avLst/>
-          </a:prstGeom>
-          <a:solidFill>
-            <a:srgbClr val="3B9177">
-              <a:alpha val="46000"/>
-            </a:srgbClr>
-          </a:solidFill>
-          <a:ln>
-            <a:noFill/>
-          </a:ln>
-        </p:spPr>
-        <p:txBody>
-          <a:bodyPr rtlCol="0" anchor="ctr"/>
-          <a:lstStyle/>
-          <a:p>
-            <a:pPr algn="ctr"/>
-          </a:p>
-        </p:txBody>
-      </p:sp>
-      <p:sp>
-        <p:nvSpPr>
-          <p:cNvPr id="13" name="Oval 12"/>
-          <p:cNvSpPr/>
-          <p:nvPr/>
-        </p:nvSpPr>
-        <p:spPr>
-          <a:xfrm>
-            <a:off x="2678400" y="482400"/>
-            <a:ext cx="43200" cy="43200"/>
-          </a:xfrm>
-          <a:prstGeom prst="ellipse">
-            <a:avLst/>
-          </a:prstGeom>
-          <a:solidFill>
-            <a:srgbClr val="3B9177">
-              <a:alpha val="34000"/>
-            </a:srgbClr>
-          </a:solidFill>
-          <a:ln>
-            <a:noFill/>
-          </a:ln>
-        </p:spPr>
-        <p:txBody>
-          <a:bodyPr rtlCol="0" anchor="ctr"/>
-          <a:lstStyle/>
-          <a:p>
-            <a:pPr algn="ctr"/>
-          </a:p>
-        </p:txBody>
-      </p:sp>
-      <p:sp>
-        <p:nvSpPr>
-          <p:cNvPr id="14" name="Oval 13"/>
-          <p:cNvSpPr/>
-          <p:nvPr/>
-        </p:nvSpPr>
-        <p:spPr>
-          <a:xfrm>
-            <a:off x="2786400" y="158400"/>
-            <a:ext cx="43200" cy="43200"/>
-          </a:xfrm>
-          <a:prstGeom prst="ellipse">
-            <a:avLst/>
-          </a:prstGeom>
-          <a:solidFill>
-            <a:srgbClr val="3B9177">
-              <a:alpha val="70000"/>
-            </a:srgbClr>
-          </a:solidFill>
-          <a:ln>
-            <a:noFill/>
-          </a:ln>
-        </p:spPr>
-        <p:txBody>
-          <a:bodyPr rtlCol="0" anchor="ctr"/>
-          <a:lstStyle/>
-          <a:p>
-            <a:pPr algn="ctr"/>
-          </a:p>
-        </p:txBody>
-      </p:sp>
-      <p:sp>
-        <p:nvSpPr>
-          <p:cNvPr id="15" name="Oval 14"/>
-          <p:cNvSpPr/>
-          <p:nvPr/>
-        </p:nvSpPr>
-        <p:spPr>
-          <a:xfrm>
-            <a:off x="2786400" y="266400"/>
-            <a:ext cx="43200" cy="43200"/>
-          </a:xfrm>
-          <a:prstGeom prst="ellipse">
-            <a:avLst/>
-          </a:prstGeom>
-          <a:solidFill>
-            <a:srgbClr val="3B9177">
-              <a:alpha val="57999"/>
-            </a:srgbClr>
-          </a:solidFill>
-          <a:ln>
-            <a:noFill/>
-          </a:ln>
-        </p:spPr>
-        <p:txBody>
-          <a:bodyPr rtlCol="0" anchor="ctr"/>
-          <a:lstStyle/>
-          <a:p>
-            <a:pPr algn="ctr"/>
-          </a:p>
-        </p:txBody>
-      </p:sp>
-      <p:sp>
-        <p:nvSpPr>
-          <p:cNvPr id="16" name="Oval 15"/>
-          <p:cNvSpPr/>
-          <p:nvPr/>
-        </p:nvSpPr>
-        <p:spPr>
-          <a:xfrm>
-            <a:off x="2786400" y="374400"/>
-            <a:ext cx="43200" cy="43200"/>
-          </a:xfrm>
-          <a:prstGeom prst="ellipse">
-            <a:avLst/>
-          </a:prstGeom>
-          <a:solidFill>
-            <a:srgbClr val="3B9177">
-              <a:alpha val="46000"/>
-            </a:srgbClr>
-          </a:solidFill>
-          <a:ln>
-            <a:noFill/>
-          </a:ln>
-        </p:spPr>
-        <p:txBody>
-          <a:bodyPr rtlCol="0" anchor="ctr"/>
-          <a:lstStyle/>
-          <a:p>
-            <a:pPr algn="ctr"/>
-          </a:p>
-        </p:txBody>
-      </p:sp>
-      <p:sp>
-        <p:nvSpPr>
-          <p:cNvPr id="17" name="Oval 16"/>
-          <p:cNvSpPr/>
-          <p:nvPr/>
-        </p:nvSpPr>
-        <p:spPr>
-          <a:xfrm>
-            <a:off x="2786400" y="482400"/>
-            <a:ext cx="43200" cy="43200"/>
-          </a:xfrm>
-          <a:prstGeom prst="ellipse">
-            <a:avLst/>
-          </a:prstGeom>
-          <a:solidFill>
-            <a:srgbClr val="3B9177">
-              <a:alpha val="34000"/>
-            </a:srgbClr>
-          </a:solidFill>
-          <a:ln>
-            <a:noFill/>
-          </a:ln>
-        </p:spPr>
-        <p:txBody>
-          <a:bodyPr rtlCol="0" anchor="ctr"/>
-          <a:lstStyle/>
-          <a:p>
-            <a:pPr algn="ctr"/>
-          </a:p>
-        </p:txBody>
-      </p:sp>
-      <p:sp>
-        <p:nvSpPr>
-          <p:cNvPr id="18" name="Oval 17"/>
-          <p:cNvSpPr/>
-          <p:nvPr/>
-        </p:nvSpPr>
-        <p:spPr>
-          <a:xfrm>
-            <a:off x="2894400" y="158400"/>
-            <a:ext cx="43200" cy="43200"/>
-          </a:xfrm>
-          <a:prstGeom prst="ellipse">
-            <a:avLst/>
-          </a:prstGeom>
-          <a:solidFill>
-            <a:srgbClr val="3B9177">
-              <a:alpha val="70000"/>
-            </a:srgbClr>
-          </a:solidFill>
-          <a:ln>
-            <a:noFill/>
-          </a:ln>
-        </p:spPr>
-        <p:txBody>
-          <a:bodyPr rtlCol="0" anchor="ctr"/>
-          <a:lstStyle/>
-          <a:p>
-            <a:pPr algn="ctr"/>
-          </a:p>
-        </p:txBody>
-      </p:sp>
-      <p:sp>
-        <p:nvSpPr>
-          <p:cNvPr id="19" name="Oval 18"/>
-          <p:cNvSpPr/>
-          <p:nvPr/>
-        </p:nvSpPr>
-        <p:spPr>
-          <a:xfrm>
-            <a:off x="2894400" y="266400"/>
-            <a:ext cx="43200" cy="43200"/>
-          </a:xfrm>
-          <a:prstGeom prst="ellipse">
-            <a:avLst/>
-          </a:prstGeom>
-          <a:solidFill>
-            <a:srgbClr val="3B9177">
-              <a:alpha val="57999"/>
-            </a:srgbClr>
-          </a:solidFill>
-          <a:ln>
-            <a:noFill/>
-          </a:ln>
-        </p:spPr>
-        <p:txBody>
-          <a:bodyPr rtlCol="0" anchor="ctr"/>
-          <a:lstStyle/>
-          <a:p>
-            <a:pPr algn="ctr"/>
-          </a:p>
-        </p:txBody>
-      </p:sp>
-      <p:sp>
-        <p:nvSpPr>
-          <p:cNvPr id="20" name="Oval 19"/>
-          <p:cNvSpPr/>
-          <p:nvPr/>
-        </p:nvSpPr>
-        <p:spPr>
-          <a:xfrm>
-            <a:off x="2894400" y="374400"/>
-            <a:ext cx="43200" cy="43200"/>
-          </a:xfrm>
-          <a:prstGeom prst="ellipse">
-            <a:avLst/>
-          </a:prstGeom>
-          <a:solidFill>
-            <a:srgbClr val="3B9177">
-              <a:alpha val="46000"/>
-            </a:srgbClr>
-          </a:solidFill>
-          <a:ln>
-            <a:noFill/>
-          </a:ln>
-        </p:spPr>
-        <p:txBody>
-          <a:bodyPr rtlCol="0" anchor="ctr"/>
-          <a:lstStyle/>
-          <a:p>
-            <a:pPr algn="ctr"/>
-          </a:p>
-        </p:txBody>
-      </p:sp>
-      <p:sp>
-        <p:nvSpPr>
-          <p:cNvPr id="21" name="Oval 20"/>
-          <p:cNvSpPr/>
-          <p:nvPr/>
-        </p:nvSpPr>
-        <p:spPr>
-          <a:xfrm>
-            <a:off x="2894400" y="482400"/>
-            <a:ext cx="43200" cy="43200"/>
-          </a:xfrm>
-          <a:prstGeom prst="ellipse">
-            <a:avLst/>
-          </a:prstGeom>
-          <a:solidFill>
-            <a:srgbClr val="3B9177">
-              <a:alpha val="34000"/>
-            </a:srgbClr>
-          </a:solidFill>
-          <a:ln>
-            <a:noFill/>
-          </a:ln>
-        </p:spPr>
-        <p:txBody>
-          <a:bodyPr rtlCol="0" anchor="ctr"/>
-          <a:lstStyle/>
-          <a:p>
-            <a:pPr algn="ctr"/>
-          </a:p>
-        </p:txBody>
-      </p:sp>
-      <p:sp>
-        <p:nvSpPr>
-          <p:cNvPr id="22" name="Rectangle 21"/>
-          <p:cNvSpPr/>
-          <p:nvPr/>
-        </p:nvSpPr>
-        <p:spPr>
-          <a:xfrm>
-            <a:off x="0" y="1663200"/>
-            <a:ext cx="3240000" cy="136800"/>
-          </a:xfrm>
-          <a:prstGeom prst="rect">
-            <a:avLst/>
-          </a:prstGeom>
-          <a:solidFill>
-            <a:srgbClr val="3B9177"/>
-          </a:solidFill>
-          <a:ln>
-            <a:noFill/>
-          </a:ln>
-        </p:spPr>
-        <p:txBody>
-          <a:bodyPr rtlCol="0" anchor="ctr"/>
-          <a:lstStyle/>
-          <a:p>
-            <a:pPr algn="ctr"/>
-          </a:p>
-        </p:txBody>
-      </p:sp>
-      <p:sp>
-        <p:nvSpPr>
-          <p:cNvPr id="23" name="Rectangle 22"/>
-          <p:cNvSpPr/>
-          <p:nvPr/>
-        </p:nvSpPr>
-        <p:spPr>
-          <a:xfrm>
-            <a:off x="0" y="1663200"/>
-            <a:ext cx="936000" cy="136800"/>
-          </a:xfrm>
-          <a:prstGeom prst="rect">
-            <a:avLst/>
-          </a:prstGeom>
-          <a:solidFill>
-            <a:srgbClr val="C8E0D9"/>
-          </a:solidFill>
-          <a:ln>
-            <a:noFill/>
-          </a:ln>
-        </p:spPr>
-        <p:txBody>
-          <a:bodyPr rtlCol="0" anchor="ctr"/>
-          <a:lstStyle/>
-          <a:p>
-            <a:pPr algn="ctr"/>
-          </a:p>
-        </p:txBody>
-      </p:sp>
-      <p:sp>
-        <p:nvSpPr>
-          <p:cNvPr id="24" name="텍스트"/>
-          <p:cNvSpPr txBox="1"/>
-          <p:nvPr/>
-        </p:nvSpPr>
-        <p:spPr>
-          <a:xfrm>
-            <a:off x="252000" y="208800"/>
-            <a:ext cx="1800000" cy="100800"/>
-          </a:xfrm>
-          <a:prstGeom prst="rect">
-            <a:avLst/>
-          </a:prstGeom>
-          <a:noFill/>
-        </p:spPr>
-        <p:txBody>
-          <a:bodyPr wrap="square" lIns="0" rIns="0" tIns="0" bIns="0" anchor="t">
-            <a:spAutoFit/>
-          </a:bodyPr>
-          <a:lstStyle/>
-          <a:p>
-            <a:pPr algn="l">
-              <a:lnSpc>
-                <a:spcPts val="1087"/>
-              </a:lnSpc>
-            </a:pPr>
-            <a:r>
-              <a:rPr sz="750" b="1" spc="150">
-                <a:solidFill>
-                  <a:srgbClr val="8C685D"/>
-                </a:solidFill>
-                <a:latin typeface="맑은 고딕"/>
-                <a:ea typeface="맑은 고딕"/>
-              </a:rPr>
-              <a:t>스튜디오 이름</a:t>
-            </a:r>
-          </a:p>
-        </p:txBody>
-      </p:sp>
-      <p:sp>
-        <p:nvSpPr>
-          <p:cNvPr id="25" name="텍스트"/>
-          <p:cNvSpPr txBox="1"/>
-          <p:nvPr/>
-        </p:nvSpPr>
-        <p:spPr>
-          <a:xfrm>
-            <a:off x="252000" y="540000"/>
-            <a:ext cx="2016000" cy="313692"/>
-          </a:xfrm>
-          <a:prstGeom prst="rect">
-            <a:avLst/>
-          </a:prstGeom>
-          <a:noFill/>
-        </p:spPr>
-        <p:txBody>
-          <a:bodyPr wrap="square" lIns="0" rIns="0" tIns="0" bIns="0" anchor="t">
-            <a:spAutoFit/>
-          </a:bodyPr>
-          <a:lstStyle/>
-          <a:p>
-            <a:pPr algn="l">
-              <a:lnSpc>
-                <a:spcPts val="2755"/>
-              </a:lnSpc>
-            </a:pPr>
-            <a:r>
-              <a:rPr sz="1900" b="1" spc="50">
-                <a:solidFill>
-                  <a:srgbClr val="5B2315"/>
-                </a:solidFill>
-                <a:latin typeface="바탕"/>
-                <a:ea typeface="바탕"/>
-              </a:rPr>
-              <a:t>임건우</a:t>
-            </a:r>
-          </a:p>
-        </p:txBody>
-      </p:sp>
-      <p:sp>
-        <p:nvSpPr>
-          <p:cNvPr id="26" name="텍스트"/>
-          <p:cNvSpPr txBox="1"/>
-          <p:nvPr/>
-        </p:nvSpPr>
-        <p:spPr>
-          <a:xfrm>
-            <a:off x="252000" y="828000"/>
-            <a:ext cx="2016000" cy="122400"/>
-          </a:xfrm>
-          <a:prstGeom prst="rect">
-            <a:avLst/>
-          </a:prstGeom>
-          <a:noFill/>
-        </p:spPr>
-        <p:txBody>
-          <a:bodyPr wrap="square" lIns="0" rIns="0" tIns="0" bIns="0" anchor="t">
-            <a:spAutoFit/>
-          </a:bodyPr>
-          <a:lstStyle/>
-          <a:p>
-            <a:pPr algn="l">
-              <a:lnSpc>
-                <a:spcPts val="1232"/>
-              </a:lnSpc>
-            </a:pPr>
-            <a:r>
-              <a:rPr sz="850" b="1">
-                <a:solidFill>
-                  <a:srgbClr val="327B65"/>
-                </a:solidFill>
-                <a:latin typeface="맑은 고딕"/>
-                <a:ea typeface="맑은 고딕"/>
-              </a:rPr>
-              <a:t>브랜드 디자이너</a:t>
-            </a:r>
-          </a:p>
-        </p:txBody>
-      </p:sp>
-      <p:sp>
-        <p:nvSpPr>
-          <p:cNvPr id="27" name="텍스트"/>
-          <p:cNvSpPr txBox="1"/>
-          <p:nvPr/>
-        </p:nvSpPr>
-        <p:spPr>
-          <a:xfrm>
-            <a:off x="252000" y="1108800"/>
-            <a:ext cx="122400" cy="168911"/>
-          </a:xfrm>
-          <a:prstGeom prst="rect">
-            <a:avLst/>
-          </a:prstGeom>
-          <a:noFill/>
-        </p:spPr>
-        <p:txBody>
-          <a:bodyPr wrap="square" lIns="0" rIns="0" tIns="0" bIns="0" anchor="t">
-            <a:spAutoFit/>
-          </a:bodyPr>
-          <a:lstStyle/>
-          <a:p>
-            <a:pPr algn="l">
-              <a:lnSpc>
-                <a:spcPts val="1015"/>
-              </a:lnSpc>
-            </a:pPr>
-            <a:r>
-              <a:rPr sz="700" b="1">
-                <a:solidFill>
-                  <a:srgbClr val="327B65"/>
-                </a:solidFill>
-                <a:latin typeface="맑은 고딕"/>
-                <a:ea typeface="맑은 고딕"/>
-              </a:rPr>
-              <a:t>T</a:t>
-            </a:r>
-          </a:p>
-        </p:txBody>
-      </p:sp>
-      <p:sp>
-        <p:nvSpPr>
-          <p:cNvPr id="28" name="텍스트"/>
-          <p:cNvSpPr txBox="1"/>
-          <p:nvPr/>
-        </p:nvSpPr>
-        <p:spPr>
-          <a:xfrm>
-            <a:off x="396000" y="1108800"/>
-            <a:ext cx="1584000" cy="168911"/>
-          </a:xfrm>
-          <a:prstGeom prst="rect">
-            <a:avLst/>
-          </a:prstGeom>
-          <a:noFill/>
-        </p:spPr>
-        <p:txBody>
-          <a:bodyPr wrap="square" lIns="0" rIns="0" tIns="0" bIns="0" anchor="t">
-            <a:spAutoFit/>
-          </a:bodyPr>
-          <a:lstStyle/>
-          <a:p>
-            <a:pPr algn="l">
-              <a:lnSpc>
-                <a:spcPts val="1015"/>
-              </a:lnSpc>
-            </a:pPr>
-            <a:r>
-              <a:rPr sz="700" b="0">
-                <a:solidFill>
-                  <a:srgbClr val="5B2315"/>
-                </a:solidFill>
-                <a:latin typeface="맑은 고딕"/>
-                <a:ea typeface="맑은 고딕"/>
-              </a:rPr>
-              <a:t>010-1234-5678</a:t>
-            </a:r>
-          </a:p>
-        </p:txBody>
-      </p:sp>
-      <p:sp>
-        <p:nvSpPr>
-          <p:cNvPr id="29" name="텍스트"/>
-          <p:cNvSpPr txBox="1"/>
-          <p:nvPr/>
-        </p:nvSpPr>
-        <p:spPr>
-          <a:xfrm>
-            <a:off x="252000" y="1277711"/>
-            <a:ext cx="122400" cy="168911"/>
-          </a:xfrm>
-          <a:prstGeom prst="rect">
-            <a:avLst/>
-          </a:prstGeom>
-          <a:noFill/>
-        </p:spPr>
-        <p:txBody>
-          <a:bodyPr wrap="square" lIns="0" rIns="0" tIns="0" bIns="0" anchor="t">
-            <a:spAutoFit/>
-          </a:bodyPr>
-          <a:lstStyle/>
-          <a:p>
-            <a:pPr algn="l">
-              <a:lnSpc>
-                <a:spcPts val="1015"/>
-              </a:lnSpc>
-            </a:pPr>
-            <a:r>
-              <a:rPr sz="700" b="1">
-                <a:solidFill>
-                  <a:srgbClr val="327B65"/>
-                </a:solidFill>
-                <a:latin typeface="맑은 고딕"/>
-                <a:ea typeface="맑은 고딕"/>
-              </a:rPr>
-              <a:t>E</a:t>
-            </a:r>
-          </a:p>
-        </p:txBody>
-      </p:sp>
-      <p:sp>
-        <p:nvSpPr>
-          <p:cNvPr id="30" name="텍스트"/>
-          <p:cNvSpPr txBox="1"/>
-          <p:nvPr/>
-        </p:nvSpPr>
-        <p:spPr>
-          <a:xfrm>
-            <a:off x="396000" y="1277711"/>
-            <a:ext cx="1584000" cy="168911"/>
-          </a:xfrm>
-          <a:prstGeom prst="rect">
-            <a:avLst/>
-          </a:prstGeom>
-          <a:noFill/>
-        </p:spPr>
-        <p:txBody>
-          <a:bodyPr wrap="square" lIns="0" rIns="0" tIns="0" bIns="0" anchor="t">
-            <a:spAutoFit/>
-          </a:bodyPr>
-          <a:lstStyle/>
-          <a:p>
-            <a:pPr algn="l">
-              <a:lnSpc>
-                <a:spcPts val="1015"/>
-              </a:lnSpc>
-            </a:pPr>
-            <a:r>
-              <a:rPr sz="700" b="0">
-                <a:solidFill>
-                  <a:srgbClr val="5B2315"/>
-                </a:solidFill>
-                <a:latin typeface="맑은 고딕"/>
-                <a:ea typeface="맑은 고딕"/>
-              </a:rPr>
-              <a:t>name@example.com</a:t>
-            </a:r>
-          </a:p>
-        </p:txBody>
-      </p:sp>
-      <p:sp>
-        <p:nvSpPr>
-          <p:cNvPr id="31" name="텍스트"/>
-          <p:cNvSpPr txBox="1"/>
-          <p:nvPr/>
-        </p:nvSpPr>
-        <p:spPr>
-          <a:xfrm>
-            <a:off x="252000" y="1446622"/>
-            <a:ext cx="122400" cy="168911"/>
-          </a:xfrm>
-          <a:prstGeom prst="rect">
-            <a:avLst/>
-          </a:prstGeom>
-          <a:noFill/>
-        </p:spPr>
-        <p:txBody>
-          <a:bodyPr wrap="square" lIns="0" rIns="0" tIns="0" bIns="0" anchor="t">
-            <a:spAutoFit/>
-          </a:bodyPr>
-          <a:lstStyle/>
-          <a:p>
-            <a:pPr algn="l">
-              <a:lnSpc>
-                <a:spcPts val="1015"/>
-              </a:lnSpc>
-            </a:pPr>
-            <a:r>
-              <a:rPr sz="700" b="1">
-                <a:solidFill>
-                  <a:srgbClr val="327B65"/>
-                </a:solidFill>
-                <a:latin typeface="맑은 고딕"/>
-                <a:ea typeface="맑은 고딕"/>
-              </a:rPr>
-              <a:t>A</a:t>
-            </a:r>
-          </a:p>
-        </p:txBody>
-      </p:sp>
-      <p:sp>
-        <p:nvSpPr>
-          <p:cNvPr id="32" name="텍스트"/>
-          <p:cNvSpPr txBox="1"/>
-          <p:nvPr/>
-        </p:nvSpPr>
-        <p:spPr>
-          <a:xfrm>
-            <a:off x="396000" y="1446622"/>
-            <a:ext cx="1584000" cy="168911"/>
-          </a:xfrm>
-          <a:prstGeom prst="rect">
-            <a:avLst/>
-          </a:prstGeom>
-          <a:noFill/>
-        </p:spPr>
-        <p:txBody>
-          <a:bodyPr wrap="square" lIns="0" rIns="0" tIns="0" bIns="0" anchor="t">
-            <a:spAutoFit/>
-          </a:bodyPr>
-          <a:lstStyle/>
-          <a:p>
-            <a:pPr algn="l">
-              <a:lnSpc>
-                <a:spcPts val="1015"/>
-              </a:lnSpc>
-            </a:pPr>
-            <a:r>
-              <a:rPr sz="700" b="0">
-                <a:solidFill>
-                  <a:srgbClr val="5B2315"/>
-                </a:solidFill>
-                <a:latin typeface="맑은 고딕"/>
-                <a:ea typeface="맑은 고딕"/>
-              </a:rPr>
-              <a:t>주소를 입력해 주세요</a:t>
-            </a:r>
-          </a:p>
-        </p:txBody>
-      </p:sp>
-      <p:sp>
-        <p:nvSpPr>
-          <p:cNvPr id="33" name="Freeform 32"/>
-          <p:cNvSpPr/>
-          <p:nvPr/>
-        </p:nvSpPr>
-        <p:spPr>
-          <a:xfrm>
-            <a:off x="2817211" y="1081239"/>
-            <a:ext cx="158900" cy="173810"/>
+            <a:off x="0" y="180000"/>
+            <a:ext cx="720000" cy="1440000"/>
           </a:xfrm>
           <a:custGeom>
             <a:avLst/>
@@ -4153,25 +3115,106 @@
             <a:cxnLst/>
             <a:rect l="l" t="t" r="r" b="b"/>
             <a:pathLst>
-              <a:path w="158900" h="173810">
+              <a:path w="720000" h="1440000">
                 <a:moveTo>
-                  <a:pt x="114776" y="0"/>
+                  <a:pt x="0" y="0"/>
                 </a:moveTo>
                 <a:lnTo>
-                  <a:pt x="158900" y="37025"/>
+                  <a:pt x="75260" y="3944"/>
                 </a:lnTo>
                 <a:lnTo>
-                  <a:pt x="44124" y="173810"/>
+                  <a:pt x="149696" y="15734"/>
                 </a:lnTo>
                 <a:lnTo>
-                  <a:pt x="0" y="136785"/>
+                  <a:pt x="222492" y="35239"/>
+                </a:lnTo>
+                <a:lnTo>
+                  <a:pt x="292850" y="62247"/>
+                </a:lnTo>
+                <a:lnTo>
+                  <a:pt x="360000" y="96462"/>
+                </a:lnTo>
+                <a:lnTo>
+                  <a:pt x="423205" y="137508"/>
+                </a:lnTo>
+                <a:lnTo>
+                  <a:pt x="481774" y="184936"/>
+                </a:lnTo>
+                <a:lnTo>
+                  <a:pt x="535064" y="238226"/>
+                </a:lnTo>
+                <a:lnTo>
+                  <a:pt x="582492" y="296795"/>
+                </a:lnTo>
+                <a:lnTo>
+                  <a:pt x="623538" y="360000"/>
+                </a:lnTo>
+                <a:lnTo>
+                  <a:pt x="657753" y="427150"/>
+                </a:lnTo>
+                <a:lnTo>
+                  <a:pt x="684761" y="497508"/>
+                </a:lnTo>
+                <a:lnTo>
+                  <a:pt x="704266" y="570304"/>
+                </a:lnTo>
+                <a:lnTo>
+                  <a:pt x="716056" y="644740"/>
+                </a:lnTo>
+                <a:lnTo>
+                  <a:pt x="720000" y="720000"/>
+                </a:lnTo>
+                <a:lnTo>
+                  <a:pt x="716056" y="795260"/>
+                </a:lnTo>
+                <a:lnTo>
+                  <a:pt x="704266" y="869696"/>
+                </a:lnTo>
+                <a:lnTo>
+                  <a:pt x="684761" y="942492"/>
+                </a:lnTo>
+                <a:lnTo>
+                  <a:pt x="657753" y="1012850"/>
+                </a:lnTo>
+                <a:lnTo>
+                  <a:pt x="623538" y="1080000"/>
+                </a:lnTo>
+                <a:lnTo>
+                  <a:pt x="582492" y="1143205"/>
+                </a:lnTo>
+                <a:lnTo>
+                  <a:pt x="535064" y="1201774"/>
+                </a:lnTo>
+                <a:lnTo>
+                  <a:pt x="481774" y="1255064"/>
+                </a:lnTo>
+                <a:lnTo>
+                  <a:pt x="423205" y="1302492"/>
+                </a:lnTo>
+                <a:lnTo>
+                  <a:pt x="360000" y="1343538"/>
+                </a:lnTo>
+                <a:lnTo>
+                  <a:pt x="292850" y="1377753"/>
+                </a:lnTo>
+                <a:lnTo>
+                  <a:pt x="222492" y="1404761"/>
+                </a:lnTo>
+                <a:lnTo>
+                  <a:pt x="149696" y="1424266"/>
+                </a:lnTo>
+                <a:lnTo>
+                  <a:pt x="75260" y="1436056"/>
+                </a:lnTo>
+                <a:lnTo>
+                  <a:pt x="0" y="1440000"/>
                 </a:lnTo>
                 <a:close/>
               </a:path>
             </a:pathLst>
           </a:custGeom>
           <a:solidFill>
-            <a:srgbClr val="3B9177"/>
+            <a:srgbClr val="0A2F7A"/>
           </a:solidFill>
           <a:ln>
             <a:noFill/>
@@ -4187,38 +3230,180 @@
       </p:sp>
       <p:sp>
         <p:nvSpPr>
-          <p:cNvPr id="34" name="Freeform 33"/>
+          <p:cNvPr id="3" name="텍스트"/>
+          <p:cNvSpPr txBox="1"/>
+          <p:nvPr/>
+        </p:nvSpPr>
+        <p:spPr>
+          <a:xfrm>
+            <a:off x="36000" y="540000"/>
+            <a:ext cx="540000" cy="720000"/>
+          </a:xfrm>
+          <a:prstGeom prst="rect">
+            <a:avLst/>
+          </a:prstGeom>
+          <a:noFill/>
+        </p:spPr>
+        <p:txBody>
+          <a:bodyPr wrap="square" lIns="0" rIns="0" tIns="0" bIns="0" anchor="ctr">
+            <a:spAutoFit/>
+          </a:bodyPr>
+          <a:lstStyle/>
+          <a:p>
+            <a:pPr algn="ctr">
+              <a:lnSpc>
+                <a:spcPts val="4350"/>
+              </a:lnSpc>
+            </a:pPr>
+            <a:r>
+              <a:rPr sz="3000" b="1">
+                <a:solidFill>
+                  <a:srgbClr val="FFFFFF"/>
+                </a:solidFill>
+                <a:latin typeface="맑은 고딕"/>
+                <a:ea typeface="맑은 고딕"/>
+              </a:rPr>
+              <a:t>임</a:t>
+            </a:r>
+          </a:p>
+        </p:txBody>
+      </p:sp>
+      <p:sp>
+        <p:nvSpPr>
+          <p:cNvPr id="4" name="텍스트"/>
+          <p:cNvSpPr txBox="1"/>
+          <p:nvPr/>
+        </p:nvSpPr>
+        <p:spPr>
+          <a:xfrm>
+            <a:off x="1116000" y="223200"/>
+            <a:ext cx="1872000" cy="133351"/>
+          </a:xfrm>
+          <a:prstGeom prst="rect">
+            <a:avLst/>
+          </a:prstGeom>
+          <a:noFill/>
+        </p:spPr>
+        <p:txBody>
+          <a:bodyPr wrap="square" lIns="0" rIns="0" tIns="0" bIns="0" anchor="t">
+            <a:spAutoFit/>
+          </a:bodyPr>
+          <a:lstStyle/>
+          <a:p>
+            <a:pPr algn="l">
+              <a:lnSpc>
+                <a:spcPts val="1015"/>
+              </a:lnSpc>
+            </a:pPr>
+            <a:r>
+              <a:rPr sz="700" b="1" spc="200">
+                <a:solidFill>
+                  <a:srgbClr val="0F1F40"/>
+                </a:solidFill>
+                <a:latin typeface="맑은 고딕"/>
+                <a:ea typeface="맑은 고딕"/>
+              </a:rPr>
+              <a:t>스튜디오 이름</a:t>
+            </a:r>
+          </a:p>
+        </p:txBody>
+      </p:sp>
+      <p:sp>
+        <p:nvSpPr>
+          <p:cNvPr id="5" name="텍스트"/>
+          <p:cNvSpPr txBox="1"/>
+          <p:nvPr/>
+        </p:nvSpPr>
+        <p:spPr>
+          <a:xfrm>
+            <a:off x="1116000" y="540000"/>
+            <a:ext cx="1872000" cy="360000"/>
+          </a:xfrm>
+          <a:prstGeom prst="rect">
+            <a:avLst/>
+          </a:prstGeom>
+          <a:noFill/>
+        </p:spPr>
+        <p:txBody>
+          <a:bodyPr wrap="square" lIns="0" rIns="0" tIns="0" bIns="0" anchor="t">
+            <a:spAutoFit/>
+          </a:bodyPr>
+          <a:lstStyle/>
+          <a:p>
+            <a:pPr algn="l">
+              <a:lnSpc>
+                <a:spcPts val="3190"/>
+              </a:lnSpc>
+            </a:pPr>
+            <a:r>
+              <a:rPr sz="2200" b="1">
+                <a:solidFill>
+                  <a:srgbClr val="12151C"/>
+                </a:solidFill>
+                <a:latin typeface="맑은 고딕"/>
+                <a:ea typeface="맑은 고딕"/>
+              </a:rPr>
+              <a:t>임건우</a:t>
+            </a:r>
+          </a:p>
+        </p:txBody>
+      </p:sp>
+      <p:sp>
+        <p:nvSpPr>
+          <p:cNvPr id="6" name="텍스트"/>
+          <p:cNvSpPr txBox="1"/>
+          <p:nvPr/>
+        </p:nvSpPr>
+        <p:spPr>
+          <a:xfrm>
+            <a:off x="1116000" y="943200"/>
+            <a:ext cx="1872000" cy="171451"/>
+          </a:xfrm>
+          <a:prstGeom prst="rect">
+            <a:avLst/>
+          </a:prstGeom>
+          <a:noFill/>
+        </p:spPr>
+        <p:txBody>
+          <a:bodyPr wrap="square" lIns="0" rIns="0" tIns="0" bIns="0" anchor="t">
+            <a:spAutoFit/>
+          </a:bodyPr>
+          <a:lstStyle/>
+          <a:p>
+            <a:pPr algn="l">
+              <a:lnSpc>
+                <a:spcPts val="1305"/>
+              </a:lnSpc>
+            </a:pPr>
+            <a:r>
+              <a:rPr sz="900" b="0">
+                <a:solidFill>
+                  <a:srgbClr val="0F1F40"/>
+                </a:solidFill>
+                <a:latin typeface="맑은 고딕"/>
+                <a:ea typeface="맑은 고딕"/>
+              </a:rPr>
+              <a:t>브랜드 디자이너</a:t>
+            </a:r>
+          </a:p>
+        </p:txBody>
+      </p:sp>
+      <p:sp>
+        <p:nvSpPr>
+          <p:cNvPr id="7" name="Rectangle 6"/>
           <p:cNvSpPr/>
           <p:nvPr/>
         </p:nvSpPr>
         <p:spPr>
           <a:xfrm>
-            <a:off x="2798546" y="1218024"/>
-            <a:ext cx="62789" cy="67049"/>
+            <a:off x="1116000" y="1195200"/>
+            <a:ext cx="144000" cy="18000"/>
           </a:xfrm>
-          <a:custGeom>
+          <a:prstGeom prst="rect">
             <a:avLst/>
-            <a:gdLst/>
-            <a:ahLst/>
-            <a:cxnLst/>
-            <a:rect l="l" t="t" r="r" b="b"/>
-            <a:pathLst>
-              <a:path w="62789" h="67049">
-                <a:moveTo>
-                  <a:pt x="18665" y="0"/>
-                </a:moveTo>
-                <a:lnTo>
-                  <a:pt x="62789" y="37025"/>
-                </a:lnTo>
-                <a:lnTo>
-                  <a:pt x="0" y="67049"/>
-                </a:lnTo>
-                <a:close/>
-              </a:path>
-            </a:pathLst>
-          </a:custGeom>
+          </a:prstGeom>
           <a:solidFill>
-            <a:srgbClr val="C8E0D9"/>
+            <a:srgbClr val="0A2F7A"/>
           </a:solidFill>
           <a:ln>
             <a:noFill/>
@@ -4234,51 +3419,241 @@
       </p:sp>
       <p:sp>
         <p:nvSpPr>
-          <p:cNvPr id="35" name="Freeform 34"/>
-          <p:cNvSpPr/>
+          <p:cNvPr id="8" name="텍스트"/>
+          <p:cNvSpPr txBox="1"/>
           <p:nvPr/>
         </p:nvSpPr>
         <p:spPr>
           <a:xfrm>
-            <a:off x="2931987" y="1059177"/>
-            <a:ext cx="62636" cy="59087"/>
+            <a:off x="1116000" y="1328400"/>
+            <a:ext cx="331200" cy="99061"/>
           </a:xfrm>
-          <a:custGeom>
+          <a:prstGeom prst="rect">
             <a:avLst/>
-            <a:gdLst/>
-            <a:ahLst/>
-            <a:cxnLst/>
-            <a:rect l="l" t="t" r="r" b="b"/>
-            <a:pathLst>
-              <a:path w="62636" h="59087">
-                <a:moveTo>
-                  <a:pt x="18512" y="0"/>
-                </a:moveTo>
-                <a:lnTo>
-                  <a:pt x="62636" y="37025"/>
-                </a:lnTo>
-                <a:lnTo>
-                  <a:pt x="44124" y="59087"/>
-                </a:lnTo>
-                <a:lnTo>
-                  <a:pt x="0" y="22062"/>
-                </a:lnTo>
-                <a:close/>
-              </a:path>
-            </a:pathLst>
-          </a:custGeom>
-          <a:solidFill>
-            <a:srgbClr val="C8E0D9"/>
-          </a:solidFill>
-          <a:ln>
-            <a:noFill/>
-          </a:ln>
+          </a:prstGeom>
+          <a:noFill/>
         </p:spPr>
         <p:txBody>
-          <a:bodyPr rtlCol="0" anchor="ctr"/>
-          <a:lstStyle/>
-          <a:p>
-            <a:pPr algn="ctr"/>
+          <a:bodyPr wrap="square" lIns="0" rIns="0" tIns="0" bIns="0" anchor="t">
+            <a:spAutoFit/>
+          </a:bodyPr>
+          <a:lstStyle/>
+          <a:p>
+            <a:pPr algn="l">
+              <a:lnSpc>
+                <a:spcPts val="754"/>
+              </a:lnSpc>
+            </a:pPr>
+            <a:r>
+              <a:rPr sz="520" b="1" spc="120">
+                <a:solidFill>
+                  <a:srgbClr val="0F1F40"/>
+                </a:solidFill>
+                <a:latin typeface="맑은 고딕"/>
+                <a:ea typeface="맑은 고딕"/>
+              </a:rPr>
+              <a:t>TEL</a:t>
+            </a:r>
+          </a:p>
+        </p:txBody>
+      </p:sp>
+      <p:sp>
+        <p:nvSpPr>
+          <p:cNvPr id="9" name="텍스트"/>
+          <p:cNvSpPr txBox="1"/>
+          <p:nvPr/>
+        </p:nvSpPr>
+        <p:spPr>
+          <a:xfrm>
+            <a:off x="1447200" y="1317600"/>
+            <a:ext cx="1440000" cy="133351"/>
+          </a:xfrm>
+          <a:prstGeom prst="rect">
+            <a:avLst/>
+          </a:prstGeom>
+          <a:noFill/>
+        </p:spPr>
+        <p:txBody>
+          <a:bodyPr wrap="square" lIns="0" rIns="0" tIns="0" bIns="0" anchor="t">
+            <a:spAutoFit/>
+          </a:bodyPr>
+          <a:lstStyle/>
+          <a:p>
+            <a:pPr algn="l">
+              <a:lnSpc>
+                <a:spcPts val="1015"/>
+              </a:lnSpc>
+            </a:pPr>
+            <a:r>
+              <a:rPr sz="700" b="0">
+                <a:solidFill>
+                  <a:srgbClr val="12151C"/>
+                </a:solidFill>
+                <a:latin typeface="맑은 고딕"/>
+                <a:ea typeface="맑은 고딕"/>
+              </a:rPr>
+              <a:t>010-1234-5678</a:t>
+            </a:r>
+          </a:p>
+        </p:txBody>
+      </p:sp>
+      <p:sp>
+        <p:nvSpPr>
+          <p:cNvPr id="10" name="텍스트"/>
+          <p:cNvSpPr txBox="1"/>
+          <p:nvPr/>
+        </p:nvSpPr>
+        <p:spPr>
+          <a:xfrm>
+            <a:off x="1116000" y="1458000"/>
+            <a:ext cx="331200" cy="99061"/>
+          </a:xfrm>
+          <a:prstGeom prst="rect">
+            <a:avLst/>
+          </a:prstGeom>
+          <a:noFill/>
+        </p:spPr>
+        <p:txBody>
+          <a:bodyPr wrap="square" lIns="0" rIns="0" tIns="0" bIns="0" anchor="t">
+            <a:spAutoFit/>
+          </a:bodyPr>
+          <a:lstStyle/>
+          <a:p>
+            <a:pPr algn="l">
+              <a:lnSpc>
+                <a:spcPts val="754"/>
+              </a:lnSpc>
+            </a:pPr>
+            <a:r>
+              <a:rPr sz="520" b="1" spc="120">
+                <a:solidFill>
+                  <a:srgbClr val="0F1F40"/>
+                </a:solidFill>
+                <a:latin typeface="맑은 고딕"/>
+                <a:ea typeface="맑은 고딕"/>
+              </a:rPr>
+              <a:t>MAIL</a:t>
+            </a:r>
+          </a:p>
+        </p:txBody>
+      </p:sp>
+      <p:sp>
+        <p:nvSpPr>
+          <p:cNvPr id="11" name="텍스트"/>
+          <p:cNvSpPr txBox="1"/>
+          <p:nvPr/>
+        </p:nvSpPr>
+        <p:spPr>
+          <a:xfrm>
+            <a:off x="1447200" y="1447200"/>
+            <a:ext cx="1440000" cy="133351"/>
+          </a:xfrm>
+          <a:prstGeom prst="rect">
+            <a:avLst/>
+          </a:prstGeom>
+          <a:noFill/>
+        </p:spPr>
+        <p:txBody>
+          <a:bodyPr wrap="square" lIns="0" rIns="0" tIns="0" bIns="0" anchor="t">
+            <a:spAutoFit/>
+          </a:bodyPr>
+          <a:lstStyle/>
+          <a:p>
+            <a:pPr algn="l">
+              <a:lnSpc>
+                <a:spcPts val="1015"/>
+              </a:lnSpc>
+            </a:pPr>
+            <a:r>
+              <a:rPr sz="700" b="0">
+                <a:solidFill>
+                  <a:srgbClr val="12151C"/>
+                </a:solidFill>
+                <a:latin typeface="맑은 고딕"/>
+                <a:ea typeface="맑은 고딕"/>
+              </a:rPr>
+              <a:t>name@example.com</a:t>
+            </a:r>
+          </a:p>
+        </p:txBody>
+      </p:sp>
+      <p:sp>
+        <p:nvSpPr>
+          <p:cNvPr id="12" name="텍스트"/>
+          <p:cNvSpPr txBox="1"/>
+          <p:nvPr/>
+        </p:nvSpPr>
+        <p:spPr>
+          <a:xfrm>
+            <a:off x="1116000" y="1587600"/>
+            <a:ext cx="331200" cy="99061"/>
+          </a:xfrm>
+          <a:prstGeom prst="rect">
+            <a:avLst/>
+          </a:prstGeom>
+          <a:noFill/>
+        </p:spPr>
+        <p:txBody>
+          <a:bodyPr wrap="square" lIns="0" rIns="0" tIns="0" bIns="0" anchor="t">
+            <a:spAutoFit/>
+          </a:bodyPr>
+          <a:lstStyle/>
+          <a:p>
+            <a:pPr algn="l">
+              <a:lnSpc>
+                <a:spcPts val="754"/>
+              </a:lnSpc>
+            </a:pPr>
+            <a:r>
+              <a:rPr sz="520" b="1" spc="120">
+                <a:solidFill>
+                  <a:srgbClr val="0F1F40"/>
+                </a:solidFill>
+                <a:latin typeface="맑은 고딕"/>
+                <a:ea typeface="맑은 고딕"/>
+              </a:rPr>
+              <a:t>ADDR</a:t>
+            </a:r>
+          </a:p>
+        </p:txBody>
+      </p:sp>
+      <p:sp>
+        <p:nvSpPr>
+          <p:cNvPr id="13" name="텍스트"/>
+          <p:cNvSpPr txBox="1"/>
+          <p:nvPr/>
+        </p:nvSpPr>
+        <p:spPr>
+          <a:xfrm>
+            <a:off x="1447200" y="1576800"/>
+            <a:ext cx="1440000" cy="133351"/>
+          </a:xfrm>
+          <a:prstGeom prst="rect">
+            <a:avLst/>
+          </a:prstGeom>
+          <a:noFill/>
+        </p:spPr>
+        <p:txBody>
+          <a:bodyPr wrap="square" lIns="0" rIns="0" tIns="0" bIns="0" anchor="t">
+            <a:spAutoFit/>
+          </a:bodyPr>
+          <a:lstStyle/>
+          <a:p>
+            <a:pPr algn="l">
+              <a:lnSpc>
+                <a:spcPts val="1015"/>
+              </a:lnSpc>
+            </a:pPr>
+            <a:r>
+              <a:rPr sz="700" b="0">
+                <a:solidFill>
+                  <a:srgbClr val="12151C"/>
+                </a:solidFill>
+                <a:latin typeface="맑은 고딕"/>
+                <a:ea typeface="맑은 고딕"/>
+              </a:rPr>
+              <a:t>주소를 입력해 주세요</a:t>
+            </a:r>
           </a:p>
         </p:txBody>
       </p:sp>
@@ -4296,7 +3671,7 @@
     <p:bg>
       <p:bgPr>
         <a:solidFill>
-          <a:srgbClr val="893520"/>
+          <a:srgbClr val="0E1116"/>
         </a:solidFill>
         <a:effectLst/>
       </p:bgPr>
@@ -4310,23 +3685,23 @@
       <p:grpSpPr/>
       <p:sp>
         <p:nvSpPr>
-          <p:cNvPr id="2" name="Rectangle 1"/>
+          <p:cNvPr id="2" name="Oval 1"/>
           <p:cNvSpPr/>
           <p:nvPr/>
         </p:nvSpPr>
         <p:spPr>
           <a:xfrm>
-            <a:off x="108000" y="108000"/>
-            <a:ext cx="3024000" cy="1584000"/>
+            <a:off x="1591200" y="511200"/>
+            <a:ext cx="57600" cy="57600"/>
           </a:xfrm>
-          <a:prstGeom prst="rect">
+          <a:prstGeom prst="ellipse">
             <a:avLst/>
           </a:prstGeom>
-          <a:noFill/>
-          <a:ln w="10800">
-            <a:solidFill>
-              <a:srgbClr val="F5D4CC"/>
-            </a:solidFill>
+          <a:solidFill>
+            <a:srgbClr val="6C82AF"/>
+          </a:solidFill>
+          <a:ln>
+            <a:noFill/>
           </a:ln>
         </p:spPr>
         <p:txBody>
@@ -4345,8 +3720,8 @@
         </p:nvSpPr>
         <p:spPr>
           <a:xfrm>
-            <a:off x="396000" y="504000"/>
-            <a:ext cx="2448000" cy="432000"/>
+            <a:off x="396000" y="684000"/>
+            <a:ext cx="2448000" cy="504000"/>
           </a:xfrm>
           <a:prstGeom prst="rect">
             <a:avLst/>
@@ -4354,7 +3729,7 @@
           <a:noFill/>
         </p:spPr>
         <p:txBody>
-          <a:bodyPr wrap="square" lIns="0" rIns="0" tIns="0" bIns="0" anchor="ctr">
+          <a:bodyPr wrap="square" lIns="0" rIns="0" tIns="0" bIns="0" anchor="t">
             <a:spAutoFit/>
           </a:bodyPr>
           <a:lstStyle/>
@@ -4369,74 +3744,24 @@
                 <a:solidFill>
                   <a:srgbClr val="FFFFFF"/>
                 </a:solidFill>
-                <a:latin typeface="바탕"/>
-                <a:ea typeface="바탕"/>
+                <a:latin typeface="맑은 고딕"/>
+                <a:ea typeface="맑은 고딕"/>
               </a:rPr>
               <a:t>기억에 남는 장면을 만듭니다</a:t>
             </a:r>
           </a:p>
         </p:txBody>
       </p:sp>
-      <p:cxnSp>
-        <p:nvCxnSpPr>
-          <p:cNvPr id="4" name="Connector 3"/>
-          <p:cNvCxnSpPr/>
+      <p:sp>
+        <p:nvSpPr>
+          <p:cNvPr id="4" name="텍스트"/>
+          <p:cNvSpPr txBox="1"/>
           <p:nvPr/>
-        </p:nvCxnSpPr>
+        </p:nvSpPr>
         <p:spPr>
           <a:xfrm>
-            <a:off x="1260000" y="1080000"/>
-            <a:ext cx="684000" cy="0"/>
-          </a:xfrm>
-          <a:prstGeom prst="line">
-            <a:avLst/>
-          </a:prstGeom>
-          <a:ln w="7200">
-            <a:solidFill>
-              <a:srgbClr val="F5D4CC"/>
-            </a:solidFill>
-          </a:ln>
-        </p:spPr>
-      </p:cxnSp>
-      <p:sp>
-        <p:nvSpPr>
-          <p:cNvPr id="5" name="Oval 4"/>
-          <p:cNvSpPr/>
-          <p:nvPr/>
-        </p:nvSpPr>
-        <p:spPr>
-          <a:xfrm>
-            <a:off x="1594800" y="1054800"/>
-            <a:ext cx="50400" cy="50400"/>
-          </a:xfrm>
-          <a:prstGeom prst="ellipse">
-            <a:avLst/>
-          </a:prstGeom>
-          <a:solidFill>
-            <a:srgbClr val="F5D4CC"/>
-          </a:solidFill>
-          <a:ln>
-            <a:noFill/>
-          </a:ln>
-        </p:spPr>
-        <p:txBody>
-          <a:bodyPr rtlCol="0" anchor="ctr"/>
-          <a:lstStyle/>
-          <a:p>
-            <a:pPr algn="ctr"/>
-          </a:p>
-        </p:txBody>
-      </p:sp>
-      <p:sp>
-        <p:nvSpPr>
-          <p:cNvPr id="6" name="텍스트"/>
-          <p:cNvSpPr txBox="1"/>
-          <p:nvPr/>
-        </p:nvSpPr>
-        <p:spPr>
-          <a:xfrm>
-            <a:off x="360000" y="1224000"/>
-            <a:ext cx="2520000" cy="108000"/>
+            <a:off x="360000" y="1339200"/>
+            <a:ext cx="2520000" cy="123826"/>
           </a:xfrm>
           <a:prstGeom prst="rect">
             <a:avLst/>
@@ -4451,166 +3776,19 @@
           <a:p>
             <a:pPr algn="ctr">
               <a:lnSpc>
-                <a:spcPts val="1087"/>
+                <a:spcPts val="942"/>
               </a:lnSpc>
             </a:pPr>
             <a:r>
-              <a:rPr sz="750" b="1" spc="300">
+              <a:rPr sz="650" b="1" spc="300">
                 <a:solidFill>
-                  <a:srgbClr val="D8BCB5"/>
+                  <a:srgbClr val="A3A9B5"/>
                 </a:solidFill>
                 <a:latin typeface="맑은 고딕"/>
                 <a:ea typeface="맑은 고딕"/>
               </a:rPr>
               <a:t>스튜디오 이름</a:t>
             </a:r>
-          </a:p>
-        </p:txBody>
-      </p:sp>
-      <p:sp>
-        <p:nvSpPr>
-          <p:cNvPr id="7" name="Freeform 6"/>
-          <p:cNvSpPr/>
-          <p:nvPr/>
-        </p:nvSpPr>
-        <p:spPr>
-          <a:xfrm>
-            <a:off x="1580757" y="257275"/>
-            <a:ext cx="99313" cy="108631"/>
-          </a:xfrm>
-          <a:custGeom>
-            <a:avLst/>
-            <a:gdLst/>
-            <a:ahLst/>
-            <a:cxnLst/>
-            <a:rect l="l" t="t" r="r" b="b"/>
-            <a:pathLst>
-              <a:path w="99313" h="108631">
-                <a:moveTo>
-                  <a:pt x="71735" y="0"/>
-                </a:moveTo>
-                <a:lnTo>
-                  <a:pt x="99313" y="23140"/>
-                </a:lnTo>
-                <a:lnTo>
-                  <a:pt x="27577" y="108631"/>
-                </a:lnTo>
-                <a:lnTo>
-                  <a:pt x="0" y="85490"/>
-                </a:lnTo>
-                <a:close/>
-              </a:path>
-            </a:pathLst>
-          </a:custGeom>
-          <a:solidFill>
-            <a:srgbClr val="F5D4CC"/>
-          </a:solidFill>
-          <a:ln>
-            <a:noFill/>
-          </a:ln>
-        </p:spPr>
-        <p:txBody>
-          <a:bodyPr rtlCol="0" anchor="ctr"/>
-          <a:lstStyle/>
-          <a:p>
-            <a:pPr algn="ctr"/>
-          </a:p>
-        </p:txBody>
-      </p:sp>
-      <p:sp>
-        <p:nvSpPr>
-          <p:cNvPr id="8" name="Freeform 7"/>
-          <p:cNvSpPr/>
-          <p:nvPr/>
-        </p:nvSpPr>
-        <p:spPr>
-          <a:xfrm>
-            <a:off x="1569091" y="342765"/>
-            <a:ext cx="39243" cy="41906"/>
-          </a:xfrm>
-          <a:custGeom>
-            <a:avLst/>
-            <a:gdLst/>
-            <a:ahLst/>
-            <a:cxnLst/>
-            <a:rect l="l" t="t" r="r" b="b"/>
-            <a:pathLst>
-              <a:path w="39243" h="41906">
-                <a:moveTo>
-                  <a:pt x="11666" y="0"/>
-                </a:moveTo>
-                <a:lnTo>
-                  <a:pt x="39243" y="23141"/>
-                </a:lnTo>
-                <a:lnTo>
-                  <a:pt x="0" y="41906"/>
-                </a:lnTo>
-                <a:close/>
-              </a:path>
-            </a:pathLst>
-          </a:custGeom>
-          <a:solidFill>
-            <a:srgbClr val="9C5544"/>
-          </a:solidFill>
-          <a:ln>
-            <a:noFill/>
-          </a:ln>
-        </p:spPr>
-        <p:txBody>
-          <a:bodyPr rtlCol="0" anchor="ctr"/>
-          <a:lstStyle/>
-          <a:p>
-            <a:pPr algn="ctr"/>
-          </a:p>
-        </p:txBody>
-      </p:sp>
-      <p:sp>
-        <p:nvSpPr>
-          <p:cNvPr id="9" name="Freeform 8"/>
-          <p:cNvSpPr/>
-          <p:nvPr/>
-        </p:nvSpPr>
-        <p:spPr>
-          <a:xfrm>
-            <a:off x="1652492" y="243486"/>
-            <a:ext cx="39148" cy="36929"/>
-          </a:xfrm>
-          <a:custGeom>
-            <a:avLst/>
-            <a:gdLst/>
-            <a:ahLst/>
-            <a:cxnLst/>
-            <a:rect l="l" t="t" r="r" b="b"/>
-            <a:pathLst>
-              <a:path w="39148" h="36929">
-                <a:moveTo>
-                  <a:pt x="11570" y="0"/>
-                </a:moveTo>
-                <a:lnTo>
-                  <a:pt x="39148" y="23140"/>
-                </a:lnTo>
-                <a:lnTo>
-                  <a:pt x="27578" y="36929"/>
-                </a:lnTo>
-                <a:lnTo>
-                  <a:pt x="0" y="13789"/>
-                </a:lnTo>
-                <a:close/>
-              </a:path>
-            </a:pathLst>
-          </a:custGeom>
-          <a:solidFill>
-            <a:srgbClr val="9C5544"/>
-          </a:solidFill>
-          <a:ln>
-            <a:noFill/>
-          </a:ln>
-        </p:spPr>
-        <p:txBody>
-          <a:bodyPr rtlCol="0" anchor="ctr"/>
-          <a:lstStyle/>
-          <a:p>
-            <a:pPr algn="ctr"/>
           </a:p>
         </p:txBody>
       </p:sp>

--- a/public/fun/cards/creative/creative-10.pptx
+++ b/public/fun/cards/creative/creative-10.pptx
@@ -3105,8 +3105,8 @@
         </p:nvSpPr>
         <p:spPr>
           <a:xfrm>
-            <a:off x="0" y="180000"/>
-            <a:ext cx="720000" cy="1440000"/>
+            <a:off x="0" y="216000"/>
+            <a:ext cx="684000" cy="1368000"/>
           </a:xfrm>
           <a:custGeom>
             <a:avLst/>
@@ -3115,99 +3115,99 @@
             <a:cxnLst/>
             <a:rect l="l" t="t" r="r" b="b"/>
             <a:pathLst>
-              <a:path w="720000" h="1440000">
+              <a:path w="684000" h="1368000">
                 <a:moveTo>
                   <a:pt x="0" y="0"/>
                 </a:moveTo>
                 <a:lnTo>
-                  <a:pt x="75260" y="3944"/>
+                  <a:pt x="71497" y="3747"/>
                 </a:lnTo>
                 <a:lnTo>
-                  <a:pt x="149696" y="15734"/>
+                  <a:pt x="142212" y="14947"/>
                 </a:lnTo>
                 <a:lnTo>
-                  <a:pt x="222492" y="35239"/>
+                  <a:pt x="211368" y="33477"/>
                 </a:lnTo>
                 <a:lnTo>
-                  <a:pt x="292850" y="62247"/>
+                  <a:pt x="278208" y="59135"/>
                 </a:lnTo>
                 <a:lnTo>
-                  <a:pt x="360000" y="96462"/>
+                  <a:pt x="342000" y="91639"/>
                 </a:lnTo>
                 <a:lnTo>
-                  <a:pt x="423205" y="137508"/>
+                  <a:pt x="402045" y="130632"/>
                 </a:lnTo>
                 <a:lnTo>
-                  <a:pt x="481774" y="184936"/>
+                  <a:pt x="457685" y="175689"/>
                 </a:lnTo>
                 <a:lnTo>
-                  <a:pt x="535064" y="238226"/>
+                  <a:pt x="508311" y="226315"/>
                 </a:lnTo>
                 <a:lnTo>
-                  <a:pt x="582492" y="296795"/>
+                  <a:pt x="553368" y="281955"/>
                 </a:lnTo>
                 <a:lnTo>
-                  <a:pt x="623538" y="360000"/>
+                  <a:pt x="592361" y="342000"/>
                 </a:lnTo>
                 <a:lnTo>
-                  <a:pt x="657753" y="427150"/>
+                  <a:pt x="624865" y="405792"/>
                 </a:lnTo>
                 <a:lnTo>
-                  <a:pt x="684761" y="497508"/>
+                  <a:pt x="650523" y="472632"/>
                 </a:lnTo>
                 <a:lnTo>
-                  <a:pt x="704266" y="570304"/>
+                  <a:pt x="669053" y="541788"/>
                 </a:lnTo>
                 <a:lnTo>
-                  <a:pt x="716056" y="644740"/>
+                  <a:pt x="680253" y="612503"/>
                 </a:lnTo>
                 <a:lnTo>
-                  <a:pt x="720000" y="720000"/>
+                  <a:pt x="684000" y="684000"/>
                 </a:lnTo>
                 <a:lnTo>
-                  <a:pt x="716056" y="795260"/>
+                  <a:pt x="680253" y="755497"/>
                 </a:lnTo>
                 <a:lnTo>
-                  <a:pt x="704266" y="869696"/>
+                  <a:pt x="669053" y="826212"/>
                 </a:lnTo>
                 <a:lnTo>
-                  <a:pt x="684761" y="942492"/>
+                  <a:pt x="650523" y="895368"/>
                 </a:lnTo>
                 <a:lnTo>
-                  <a:pt x="657753" y="1012850"/>
+                  <a:pt x="624865" y="962208"/>
                 </a:lnTo>
                 <a:lnTo>
-                  <a:pt x="623538" y="1080000"/>
+                  <a:pt x="592361" y="1026000"/>
                 </a:lnTo>
                 <a:lnTo>
-                  <a:pt x="582492" y="1143205"/>
+                  <a:pt x="553368" y="1086045"/>
                 </a:lnTo>
                 <a:lnTo>
-                  <a:pt x="535064" y="1201774"/>
+                  <a:pt x="508311" y="1141685"/>
                 </a:lnTo>
                 <a:lnTo>
-                  <a:pt x="481774" y="1255064"/>
+                  <a:pt x="457685" y="1192311"/>
                 </a:lnTo>
                 <a:lnTo>
-                  <a:pt x="423205" y="1302492"/>
+                  <a:pt x="402045" y="1237368"/>
                 </a:lnTo>
                 <a:lnTo>
-                  <a:pt x="360000" y="1343538"/>
+                  <a:pt x="342000" y="1276361"/>
                 </a:lnTo>
                 <a:lnTo>
-                  <a:pt x="292850" y="1377753"/>
+                  <a:pt x="278208" y="1308865"/>
                 </a:lnTo>
                 <a:lnTo>
-                  <a:pt x="222492" y="1404761"/>
+                  <a:pt x="211368" y="1334523"/>
                 </a:lnTo>
                 <a:lnTo>
-                  <a:pt x="149696" y="1424266"/>
+                  <a:pt x="142212" y="1353053"/>
                 </a:lnTo>
                 <a:lnTo>
-                  <a:pt x="75260" y="1436056"/>
+                  <a:pt x="71497" y="1364253"/>
                 </a:lnTo>
                 <a:lnTo>
-                  <a:pt x="0" y="1440000"/>
+                  <a:pt x="0" y="1368000"/>
                 </a:lnTo>
                 <a:close/>
               </a:path>
@@ -3230,14 +3230,72 @@
       </p:sp>
       <p:sp>
         <p:nvSpPr>
-          <p:cNvPr id="3" name="텍스트"/>
+          <p:cNvPr id="3" name="Oval 2"/>
+          <p:cNvSpPr/>
+          <p:nvPr/>
+        </p:nvSpPr>
+        <p:spPr>
+          <a:xfrm>
+            <a:off x="-432000" y="468000"/>
+            <a:ext cx="864000" cy="864000"/>
+          </a:xfrm>
+          <a:prstGeom prst="ellipse">
+            <a:avLst/>
+          </a:prstGeom>
+          <a:noFill/>
+          <a:ln w="4320">
+            <a:solidFill>
+              <a:srgbClr val="FFFFFF"/>
+            </a:solidFill>
+          </a:ln>
+        </p:spPr>
+        <p:txBody>
+          <a:bodyPr rtlCol="0" anchor="ctr"/>
+          <a:lstStyle/>
+          <a:p>
+            <a:pPr algn="ctr"/>
+          </a:p>
+        </p:txBody>
+      </p:sp>
+      <p:sp>
+        <p:nvSpPr>
+          <p:cNvPr id="4" name="Oval 3"/>
+          <p:cNvSpPr/>
+          <p:nvPr/>
+        </p:nvSpPr>
+        <p:spPr>
+          <a:xfrm>
+            <a:off x="-252000" y="648000"/>
+            <a:ext cx="504000" cy="504000"/>
+          </a:xfrm>
+          <a:prstGeom prst="ellipse">
+            <a:avLst/>
+          </a:prstGeom>
+          <a:noFill/>
+          <a:ln w="4320">
+            <a:solidFill>
+              <a:srgbClr val="FFFFFF"/>
+            </a:solidFill>
+          </a:ln>
+        </p:spPr>
+        <p:txBody>
+          <a:bodyPr rtlCol="0" anchor="ctr"/>
+          <a:lstStyle/>
+          <a:p>
+            <a:pPr algn="ctr"/>
+          </a:p>
+        </p:txBody>
+      </p:sp>
+      <p:sp>
+        <p:nvSpPr>
+          <p:cNvPr id="5" name="텍스트"/>
           <p:cNvSpPr txBox="1"/>
           <p:nvPr/>
         </p:nvSpPr>
         <p:spPr>
           <a:xfrm>
-            <a:off x="36000" y="540000"/>
-            <a:ext cx="540000" cy="720000"/>
+            <a:off x="86400" y="612000"/>
+            <a:ext cx="324000" cy="576000"/>
           </a:xfrm>
           <a:prstGeom prst="rect">
             <a:avLst/>
@@ -3252,32 +3310,32 @@
           <a:p>
             <a:pPr algn="ctr">
               <a:lnSpc>
-                <a:spcPts val="4350"/>
+                <a:spcPts val="1450"/>
               </a:lnSpc>
             </a:pPr>
             <a:r>
-              <a:rPr sz="3000" b="1">
+              <a:rPr sz="1000" b="1">
                 <a:solidFill>
                   <a:srgbClr val="FFFFFF"/>
                 </a:solidFill>
                 <a:latin typeface="맑은 고딕"/>
                 <a:ea typeface="맑은 고딕"/>
               </a:rPr>
-              <a:t>임</a:t>
-            </a:r>
-          </a:p>
-        </p:txBody>
-      </p:sp>
-      <p:sp>
-        <p:nvSpPr>
-          <p:cNvPr id="4" name="텍스트"/>
+              <a:t>스</a:t>
+            </a:r>
+          </a:p>
+        </p:txBody>
+      </p:sp>
+      <p:sp>
+        <p:nvSpPr>
+          <p:cNvPr id="6" name="텍스트"/>
           <p:cNvSpPr txBox="1"/>
           <p:nvPr/>
         </p:nvSpPr>
         <p:spPr>
           <a:xfrm>
-            <a:off x="1116000" y="223200"/>
-            <a:ext cx="1872000" cy="133351"/>
+            <a:off x="1116000" y="252000"/>
+            <a:ext cx="1872000" cy="123826"/>
           </a:xfrm>
           <a:prstGeom prst="rect">
             <a:avLst/>
@@ -3292,11 +3350,11 @@
           <a:p>
             <a:pPr algn="l">
               <a:lnSpc>
-                <a:spcPts val="1015"/>
+                <a:spcPts val="942"/>
               </a:lnSpc>
             </a:pPr>
             <a:r>
-              <a:rPr sz="700" b="1" spc="200">
+              <a:rPr sz="650" b="1" spc="220">
                 <a:solidFill>
                   <a:srgbClr val="0F1F40"/>
                 </a:solidFill>
@@ -3308,16 +3366,37 @@
           </a:p>
         </p:txBody>
       </p:sp>
-      <p:sp>
-        <p:nvSpPr>
-          <p:cNvPr id="5" name="텍스트"/>
+      <p:cxnSp>
+        <p:nvCxnSpPr>
+          <p:cNvPr id="7" name="Connector 6"/>
+          <p:cNvCxnSpPr/>
+          <p:nvPr/>
+        </p:nvCxnSpPr>
+        <p:spPr>
+          <a:xfrm>
+            <a:off x="1116000" y="424800"/>
+            <a:ext cx="1872000" cy="0"/>
+          </a:xfrm>
+          <a:prstGeom prst="line">
+            <a:avLst/>
+          </a:prstGeom>
+          <a:ln w="3600">
+            <a:solidFill>
+              <a:srgbClr val="BAC5DA"/>
+            </a:solidFill>
+          </a:ln>
+        </p:spPr>
+      </p:cxnSp>
+      <p:sp>
+        <p:nvSpPr>
+          <p:cNvPr id="8" name="텍스트"/>
           <p:cNvSpPr txBox="1"/>
           <p:nvPr/>
         </p:nvSpPr>
         <p:spPr>
           <a:xfrm>
-            <a:off x="1116000" y="540000"/>
-            <a:ext cx="1872000" cy="360000"/>
+            <a:off x="1116000" y="648000"/>
+            <a:ext cx="1800000" cy="237600"/>
           </a:xfrm>
           <a:prstGeom prst="rect">
             <a:avLst/>
@@ -3332,11 +3411,11 @@
           <a:p>
             <a:pPr algn="l">
               <a:lnSpc>
-                <a:spcPts val="3190"/>
+                <a:spcPts val="1957"/>
               </a:lnSpc>
             </a:pPr>
             <a:r>
-              <a:rPr sz="2200" b="1">
+              <a:rPr sz="1350" b="1" spc="120">
                 <a:solidFill>
                   <a:srgbClr val="12151C"/>
                 </a:solidFill>
@@ -3350,14 +3429,14 @@
       </p:sp>
       <p:sp>
         <p:nvSpPr>
-          <p:cNvPr id="6" name="텍스트"/>
+          <p:cNvPr id="9" name="텍스트"/>
           <p:cNvSpPr txBox="1"/>
           <p:nvPr/>
         </p:nvSpPr>
         <p:spPr>
           <a:xfrm>
-            <a:off x="1116000" y="943200"/>
-            <a:ext cx="1872000" cy="171451"/>
+            <a:off x="1116000" y="900000"/>
+            <a:ext cx="1800000" cy="133351"/>
           </a:xfrm>
           <a:prstGeom prst="rect">
             <a:avLst/>
@@ -3372,11 +3451,11 @@
           <a:p>
             <a:pPr algn="l">
               <a:lnSpc>
-                <a:spcPts val="1305"/>
+                <a:spcPts val="1015"/>
               </a:lnSpc>
             </a:pPr>
             <a:r>
-              <a:rPr sz="900" b="0">
+              <a:rPr sz="700" b="0" spc="60">
                 <a:solidFill>
                   <a:srgbClr val="0F1F40"/>
                 </a:solidFill>
@@ -3388,45 +3467,37 @@
           </a:p>
         </p:txBody>
       </p:sp>
-      <p:sp>
-        <p:nvSpPr>
-          <p:cNvPr id="7" name="Rectangle 6"/>
-          <p:cNvSpPr/>
+      <p:cxnSp>
+        <p:nvCxnSpPr>
+          <p:cNvPr id="10" name="Connector 9"/>
+          <p:cNvCxnSpPr/>
           <p:nvPr/>
-        </p:nvSpPr>
-        <p:spPr>
-          <a:xfrm>
-            <a:off x="1116000" y="1195200"/>
-            <a:ext cx="144000" cy="18000"/>
-          </a:xfrm>
-          <a:prstGeom prst="rect">
+        </p:nvCxnSpPr>
+        <p:spPr>
+          <a:xfrm>
+            <a:off x="1116000" y="1267200"/>
+            <a:ext cx="1872000" cy="0"/>
+          </a:xfrm>
+          <a:prstGeom prst="line">
             <a:avLst/>
           </a:prstGeom>
-          <a:solidFill>
-            <a:srgbClr val="0A2F7A"/>
-          </a:solidFill>
-          <a:ln>
-            <a:noFill/>
+          <a:ln w="3600">
+            <a:solidFill>
+              <a:srgbClr val="BAC5DA"/>
+            </a:solidFill>
           </a:ln>
         </p:spPr>
-        <p:txBody>
-          <a:bodyPr rtlCol="0" anchor="ctr"/>
-          <a:lstStyle/>
-          <a:p>
-            <a:pPr algn="ctr"/>
-          </a:p>
-        </p:txBody>
-      </p:sp>
-      <p:sp>
-        <p:nvSpPr>
-          <p:cNvPr id="8" name="텍스트"/>
+      </p:cxnSp>
+      <p:sp>
+        <p:nvSpPr>
+          <p:cNvPr id="11" name="텍스트"/>
           <p:cNvSpPr txBox="1"/>
           <p:nvPr/>
         </p:nvSpPr>
         <p:spPr>
           <a:xfrm>
-            <a:off x="1116000" y="1328400"/>
-            <a:ext cx="331200" cy="99061"/>
+            <a:off x="1116000" y="1357200"/>
+            <a:ext cx="331200" cy="91441"/>
           </a:xfrm>
           <a:prstGeom prst="rect">
             <a:avLst/>
@@ -3441,11 +3512,11 @@
           <a:p>
             <a:pPr algn="l">
               <a:lnSpc>
-                <a:spcPts val="754"/>
+                <a:spcPts val="696"/>
               </a:lnSpc>
             </a:pPr>
             <a:r>
-              <a:rPr sz="520" b="1" spc="120">
+              <a:rPr sz="480" b="1" spc="140">
                 <a:solidFill>
                   <a:srgbClr val="0F1F40"/>
                 </a:solidFill>
@@ -3459,14 +3530,14 @@
       </p:sp>
       <p:sp>
         <p:nvSpPr>
-          <p:cNvPr id="9" name="텍스트"/>
+          <p:cNvPr id="12" name="텍스트"/>
           <p:cNvSpPr txBox="1"/>
           <p:nvPr/>
         </p:nvSpPr>
         <p:spPr>
           <a:xfrm>
-            <a:off x="1447200" y="1317600"/>
-            <a:ext cx="1440000" cy="133351"/>
+            <a:off x="1447200" y="1346400"/>
+            <a:ext cx="1188000" cy="123826"/>
           </a:xfrm>
           <a:prstGeom prst="rect">
             <a:avLst/>
@@ -3481,11 +3552,11 @@
           <a:p>
             <a:pPr algn="l">
               <a:lnSpc>
-                <a:spcPts val="1015"/>
+                <a:spcPts val="942"/>
               </a:lnSpc>
             </a:pPr>
             <a:r>
-              <a:rPr sz="700" b="0">
+              <a:rPr sz="650" b="0">
                 <a:solidFill>
                   <a:srgbClr val="12151C"/>
                 </a:solidFill>
@@ -3499,14 +3570,14 @@
       </p:sp>
       <p:sp>
         <p:nvSpPr>
-          <p:cNvPr id="10" name="텍스트"/>
+          <p:cNvPr id="13" name="텍스트"/>
           <p:cNvSpPr txBox="1"/>
           <p:nvPr/>
         </p:nvSpPr>
         <p:spPr>
           <a:xfrm>
-            <a:off x="1116000" y="1458000"/>
-            <a:ext cx="331200" cy="99061"/>
+            <a:off x="1116000" y="1479600"/>
+            <a:ext cx="331200" cy="91441"/>
           </a:xfrm>
           <a:prstGeom prst="rect">
             <a:avLst/>
@@ -3521,11 +3592,11 @@
           <a:p>
             <a:pPr algn="l">
               <a:lnSpc>
-                <a:spcPts val="754"/>
+                <a:spcPts val="696"/>
               </a:lnSpc>
             </a:pPr>
             <a:r>
-              <a:rPr sz="520" b="1" spc="120">
+              <a:rPr sz="480" b="1" spc="140">
                 <a:solidFill>
                   <a:srgbClr val="0F1F40"/>
                 </a:solidFill>
@@ -3539,14 +3610,14 @@
       </p:sp>
       <p:sp>
         <p:nvSpPr>
-          <p:cNvPr id="11" name="텍스트"/>
+          <p:cNvPr id="14" name="텍스트"/>
           <p:cNvSpPr txBox="1"/>
           <p:nvPr/>
         </p:nvSpPr>
         <p:spPr>
           <a:xfrm>
-            <a:off x="1447200" y="1447200"/>
-            <a:ext cx="1440000" cy="133351"/>
+            <a:off x="1447200" y="1468800"/>
+            <a:ext cx="1188000" cy="123826"/>
           </a:xfrm>
           <a:prstGeom prst="rect">
             <a:avLst/>
@@ -3561,11 +3632,11 @@
           <a:p>
             <a:pPr algn="l">
               <a:lnSpc>
-                <a:spcPts val="1015"/>
+                <a:spcPts val="942"/>
               </a:lnSpc>
             </a:pPr>
             <a:r>
-              <a:rPr sz="700" b="0">
+              <a:rPr sz="650" b="0">
                 <a:solidFill>
                   <a:srgbClr val="12151C"/>
                 </a:solidFill>
@@ -3579,14 +3650,14 @@
       </p:sp>
       <p:sp>
         <p:nvSpPr>
-          <p:cNvPr id="12" name="텍스트"/>
+          <p:cNvPr id="15" name="텍스트"/>
           <p:cNvSpPr txBox="1"/>
           <p:nvPr/>
         </p:nvSpPr>
         <p:spPr>
           <a:xfrm>
-            <a:off x="1116000" y="1587600"/>
-            <a:ext cx="331200" cy="99061"/>
+            <a:off x="1116000" y="1602000"/>
+            <a:ext cx="331200" cy="91441"/>
           </a:xfrm>
           <a:prstGeom prst="rect">
             <a:avLst/>
@@ -3601,11 +3672,11 @@
           <a:p>
             <a:pPr algn="l">
               <a:lnSpc>
-                <a:spcPts val="754"/>
+                <a:spcPts val="696"/>
               </a:lnSpc>
             </a:pPr>
             <a:r>
-              <a:rPr sz="520" b="1" spc="120">
+              <a:rPr sz="480" b="1" spc="140">
                 <a:solidFill>
                   <a:srgbClr val="0F1F40"/>
                 </a:solidFill>
@@ -3619,14 +3690,14 @@
       </p:sp>
       <p:sp>
         <p:nvSpPr>
-          <p:cNvPr id="13" name="텍스트"/>
+          <p:cNvPr id="16" name="텍스트"/>
           <p:cNvSpPr txBox="1"/>
           <p:nvPr/>
         </p:nvSpPr>
         <p:spPr>
           <a:xfrm>
-            <a:off x="1447200" y="1576800"/>
-            <a:ext cx="1440000" cy="133351"/>
+            <a:off x="1447200" y="1591200"/>
+            <a:ext cx="1188000" cy="123826"/>
           </a:xfrm>
           <a:prstGeom prst="rect">
             <a:avLst/>
@@ -3641,11 +3712,11 @@
           <a:p>
             <a:pPr algn="l">
               <a:lnSpc>
-                <a:spcPts val="1015"/>
+                <a:spcPts val="942"/>
               </a:lnSpc>
             </a:pPr>
             <a:r>
-              <a:rPr sz="700" b="0">
+              <a:rPr sz="650" b="0">
                 <a:solidFill>
                   <a:srgbClr val="12151C"/>
                 </a:solidFill>
@@ -3683,18 +3754,226 @@
         <p:nvPr/>
       </p:nvGrpSpPr>
       <p:grpSpPr/>
-      <p:sp>
-        <p:nvSpPr>
-          <p:cNvPr id="2" name="Oval 1"/>
+      <p:cxnSp>
+        <p:nvCxnSpPr>
+          <p:cNvPr id="2" name="Connector 1"/>
+          <p:cNvCxnSpPr/>
+          <p:nvPr/>
+        </p:nvCxnSpPr>
+        <p:spPr>
+          <a:xfrm>
+            <a:off x="93600" y="122400"/>
+            <a:ext cx="57600" cy="0"/>
+          </a:xfrm>
+          <a:prstGeom prst="line">
+            <a:avLst/>
+          </a:prstGeom>
+          <a:ln w="3600">
+            <a:solidFill>
+              <a:srgbClr val="2A2F38"/>
+            </a:solidFill>
+          </a:ln>
+        </p:spPr>
+      </p:cxnSp>
+      <p:cxnSp>
+        <p:nvCxnSpPr>
+          <p:cNvPr id="3" name="Connector 2"/>
+          <p:cNvCxnSpPr/>
+          <p:nvPr/>
+        </p:nvCxnSpPr>
+        <p:spPr>
+          <a:xfrm>
+            <a:off x="122400" y="93600"/>
+            <a:ext cx="0" cy="57600"/>
+          </a:xfrm>
+          <a:prstGeom prst="line">
+            <a:avLst/>
+          </a:prstGeom>
+          <a:ln w="3600">
+            <a:solidFill>
+              <a:srgbClr val="2A2F38"/>
+            </a:solidFill>
+          </a:ln>
+        </p:spPr>
+      </p:cxnSp>
+      <p:cxnSp>
+        <p:nvCxnSpPr>
+          <p:cNvPr id="4" name="Connector 3"/>
+          <p:cNvCxnSpPr/>
+          <p:nvPr/>
+        </p:nvCxnSpPr>
+        <p:spPr>
+          <a:xfrm>
+            <a:off x="3088800" y="122400"/>
+            <a:ext cx="57600" cy="0"/>
+          </a:xfrm>
+          <a:prstGeom prst="line">
+            <a:avLst/>
+          </a:prstGeom>
+          <a:ln w="3600">
+            <a:solidFill>
+              <a:srgbClr val="2A2F38"/>
+            </a:solidFill>
+          </a:ln>
+        </p:spPr>
+      </p:cxnSp>
+      <p:cxnSp>
+        <p:nvCxnSpPr>
+          <p:cNvPr id="5" name="Connector 4"/>
+          <p:cNvCxnSpPr/>
+          <p:nvPr/>
+        </p:nvCxnSpPr>
+        <p:spPr>
+          <a:xfrm>
+            <a:off x="3117600" y="93600"/>
+            <a:ext cx="0" cy="57600"/>
+          </a:xfrm>
+          <a:prstGeom prst="line">
+            <a:avLst/>
+          </a:prstGeom>
+          <a:ln w="3600">
+            <a:solidFill>
+              <a:srgbClr val="2A2F38"/>
+            </a:solidFill>
+          </a:ln>
+        </p:spPr>
+      </p:cxnSp>
+      <p:cxnSp>
+        <p:nvCxnSpPr>
+          <p:cNvPr id="6" name="Connector 5"/>
+          <p:cNvCxnSpPr/>
+          <p:nvPr/>
+        </p:nvCxnSpPr>
+        <p:spPr>
+          <a:xfrm>
+            <a:off x="93600" y="1677600"/>
+            <a:ext cx="57600" cy="0"/>
+          </a:xfrm>
+          <a:prstGeom prst="line">
+            <a:avLst/>
+          </a:prstGeom>
+          <a:ln w="3600">
+            <a:solidFill>
+              <a:srgbClr val="2A2F38"/>
+            </a:solidFill>
+          </a:ln>
+        </p:spPr>
+      </p:cxnSp>
+      <p:cxnSp>
+        <p:nvCxnSpPr>
+          <p:cNvPr id="7" name="Connector 6"/>
+          <p:cNvCxnSpPr/>
+          <p:nvPr/>
+        </p:nvCxnSpPr>
+        <p:spPr>
+          <a:xfrm>
+            <a:off x="122400" y="1648800"/>
+            <a:ext cx="0" cy="57600"/>
+          </a:xfrm>
+          <a:prstGeom prst="line">
+            <a:avLst/>
+          </a:prstGeom>
+          <a:ln w="3600">
+            <a:solidFill>
+              <a:srgbClr val="2A2F38"/>
+            </a:solidFill>
+          </a:ln>
+        </p:spPr>
+      </p:cxnSp>
+      <p:cxnSp>
+        <p:nvCxnSpPr>
+          <p:cNvPr id="8" name="Connector 7"/>
+          <p:cNvCxnSpPr/>
+          <p:nvPr/>
+        </p:nvCxnSpPr>
+        <p:spPr>
+          <a:xfrm>
+            <a:off x="3088800" y="1677600"/>
+            <a:ext cx="57600" cy="0"/>
+          </a:xfrm>
+          <a:prstGeom prst="line">
+            <a:avLst/>
+          </a:prstGeom>
+          <a:ln w="3600">
+            <a:solidFill>
+              <a:srgbClr val="2A2F38"/>
+            </a:solidFill>
+          </a:ln>
+        </p:spPr>
+      </p:cxnSp>
+      <p:cxnSp>
+        <p:nvCxnSpPr>
+          <p:cNvPr id="9" name="Connector 8"/>
+          <p:cNvCxnSpPr/>
+          <p:nvPr/>
+        </p:nvCxnSpPr>
+        <p:spPr>
+          <a:xfrm>
+            <a:off x="3117600" y="1648800"/>
+            <a:ext cx="0" cy="57600"/>
+          </a:xfrm>
+          <a:prstGeom prst="line">
+            <a:avLst/>
+          </a:prstGeom>
+          <a:ln w="3600">
+            <a:solidFill>
+              <a:srgbClr val="2A2F38"/>
+            </a:solidFill>
+          </a:ln>
+        </p:spPr>
+      </p:cxnSp>
+      <p:sp>
+        <p:nvSpPr>
+          <p:cNvPr id="10" name="텍스트"/>
+          <p:cNvSpPr txBox="1"/>
+          <p:nvPr/>
+        </p:nvSpPr>
+        <p:spPr>
+          <a:xfrm>
+            <a:off x="360000" y="331200"/>
+            <a:ext cx="2520000" cy="99061"/>
+          </a:xfrm>
+          <a:prstGeom prst="rect">
+            <a:avLst/>
+          </a:prstGeom>
+          <a:noFill/>
+        </p:spPr>
+        <p:txBody>
+          <a:bodyPr wrap="square" lIns="0" rIns="0" tIns="0" bIns="0" anchor="t">
+            <a:spAutoFit/>
+          </a:bodyPr>
+          <a:lstStyle/>
+          <a:p>
+            <a:pPr algn="ctr">
+              <a:lnSpc>
+                <a:spcPts val="754"/>
+              </a:lnSpc>
+            </a:pPr>
+            <a:r>
+              <a:rPr sz="520" b="1" spc="240">
+                <a:solidFill>
+                  <a:srgbClr val="A3A9B5"/>
+                </a:solidFill>
+                <a:latin typeface="맑은 고딕"/>
+                <a:ea typeface="맑은 고딕"/>
+              </a:rPr>
+              <a:t>작업 분야</a:t>
+            </a:r>
+          </a:p>
+        </p:txBody>
+      </p:sp>
+      <p:sp>
+        <p:nvSpPr>
+          <p:cNvPr id="11" name="Rectangle 10"/>
           <p:cNvSpPr/>
           <p:nvPr/>
         </p:nvSpPr>
         <p:spPr>
           <a:xfrm>
-            <a:off x="1591200" y="511200"/>
-            <a:ext cx="57600" cy="57600"/>
-          </a:xfrm>
-          <a:prstGeom prst="ellipse">
+            <a:off x="1530000" y="453600"/>
+            <a:ext cx="180000" cy="14400"/>
+          </a:xfrm>
+          <a:prstGeom prst="rect">
             <a:avLst/>
           </a:prstGeom>
           <a:solidFill>
@@ -3714,14 +3993,14 @@
       </p:sp>
       <p:sp>
         <p:nvSpPr>
-          <p:cNvPr id="3" name="텍스트"/>
+          <p:cNvPr id="12" name="텍스트"/>
           <p:cNvSpPr txBox="1"/>
           <p:nvPr/>
         </p:nvSpPr>
         <p:spPr>
           <a:xfrm>
-            <a:off x="396000" y="684000"/>
-            <a:ext cx="2448000" cy="504000"/>
+            <a:off x="360000" y="684000"/>
+            <a:ext cx="630000" cy="216000"/>
           </a:xfrm>
           <a:prstGeom prst="rect">
             <a:avLst/>
@@ -3729,38 +4008,322 @@
           <a:noFill/>
         </p:spPr>
         <p:txBody>
-          <a:bodyPr wrap="square" lIns="0" rIns="0" tIns="0" bIns="0" anchor="t">
+          <a:bodyPr wrap="square" lIns="0" rIns="0" tIns="0" bIns="0" anchor="ctr">
             <a:spAutoFit/>
           </a:bodyPr>
           <a:lstStyle/>
           <a:p>
             <a:pPr algn="ctr">
               <a:lnSpc>
-                <a:spcPts val="1739"/>
+                <a:spcPts val="1015"/>
               </a:lnSpc>
             </a:pPr>
             <a:r>
-              <a:rPr sz="1200" b="1">
+              <a:rPr sz="700" b="1">
                 <a:solidFill>
                   <a:srgbClr val="FFFFFF"/>
                 </a:solidFill>
                 <a:latin typeface="맑은 고딕"/>
                 <a:ea typeface="맑은 고딕"/>
               </a:rPr>
-              <a:t>기억에 남는 장면을 만듭니다</a:t>
-            </a:r>
-          </a:p>
-        </p:txBody>
-      </p:sp>
-      <p:sp>
-        <p:nvSpPr>
-          <p:cNvPr id="4" name="텍스트"/>
+              <a:t>편집 디자인</a:t>
+            </a:r>
+          </a:p>
+        </p:txBody>
+      </p:sp>
+      <p:sp>
+        <p:nvSpPr>
+          <p:cNvPr id="13" name="텍스트"/>
           <p:cNvSpPr txBox="1"/>
           <p:nvPr/>
         </p:nvSpPr>
         <p:spPr>
           <a:xfrm>
-            <a:off x="360000" y="1339200"/>
+            <a:off x="990000" y="684000"/>
+            <a:ext cx="630000" cy="216000"/>
+          </a:xfrm>
+          <a:prstGeom prst="rect">
+            <a:avLst/>
+          </a:prstGeom>
+          <a:noFill/>
+        </p:spPr>
+        <p:txBody>
+          <a:bodyPr wrap="square" lIns="0" rIns="0" tIns="0" bIns="0" anchor="ctr">
+            <a:spAutoFit/>
+          </a:bodyPr>
+          <a:lstStyle/>
+          <a:p>
+            <a:pPr algn="ctr">
+              <a:lnSpc>
+                <a:spcPts val="1015"/>
+              </a:lnSpc>
+            </a:pPr>
+            <a:r>
+              <a:rPr sz="700" b="1">
+                <a:solidFill>
+                  <a:srgbClr val="FFFFFF"/>
+                </a:solidFill>
+                <a:latin typeface="맑은 고딕"/>
+                <a:ea typeface="맑은 고딕"/>
+              </a:rPr>
+              <a:t>웹툰</a:t>
+            </a:r>
+          </a:p>
+        </p:txBody>
+      </p:sp>
+      <p:cxnSp>
+        <p:nvCxnSpPr>
+          <p:cNvPr id="14" name="Connector 13"/>
+          <p:cNvCxnSpPr/>
+          <p:nvPr/>
+        </p:nvCxnSpPr>
+        <p:spPr>
+          <a:xfrm>
+            <a:off x="990000" y="676800"/>
+            <a:ext cx="0" cy="230400"/>
+          </a:xfrm>
+          <a:prstGeom prst="line">
+            <a:avLst/>
+          </a:prstGeom>
+          <a:ln w="3600">
+            <a:solidFill>
+              <a:srgbClr val="2A2F38"/>
+            </a:solidFill>
+          </a:ln>
+        </p:spPr>
+      </p:cxnSp>
+      <p:sp>
+        <p:nvSpPr>
+          <p:cNvPr id="15" name="텍스트"/>
+          <p:cNvSpPr txBox="1"/>
+          <p:nvPr/>
+        </p:nvSpPr>
+        <p:spPr>
+          <a:xfrm>
+            <a:off x="1620000" y="684000"/>
+            <a:ext cx="630000" cy="216000"/>
+          </a:xfrm>
+          <a:prstGeom prst="rect">
+            <a:avLst/>
+          </a:prstGeom>
+          <a:noFill/>
+        </p:spPr>
+        <p:txBody>
+          <a:bodyPr wrap="square" lIns="0" rIns="0" tIns="0" bIns="0" anchor="ctr">
+            <a:spAutoFit/>
+          </a:bodyPr>
+          <a:lstStyle/>
+          <a:p>
+            <a:pPr algn="ctr">
+              <a:lnSpc>
+                <a:spcPts val="1015"/>
+              </a:lnSpc>
+            </a:pPr>
+            <a:r>
+              <a:rPr sz="700" b="1">
+                <a:solidFill>
+                  <a:srgbClr val="FFFFFF"/>
+                </a:solidFill>
+                <a:latin typeface="맑은 고딕"/>
+                <a:ea typeface="맑은 고딕"/>
+              </a:rPr>
+              <a:t>인물 촬영</a:t>
+            </a:r>
+          </a:p>
+        </p:txBody>
+      </p:sp>
+      <p:cxnSp>
+        <p:nvCxnSpPr>
+          <p:cNvPr id="16" name="Connector 15"/>
+          <p:cNvCxnSpPr/>
+          <p:nvPr/>
+        </p:nvCxnSpPr>
+        <p:spPr>
+          <a:xfrm>
+            <a:off x="1620000" y="676800"/>
+            <a:ext cx="0" cy="230400"/>
+          </a:xfrm>
+          <a:prstGeom prst="line">
+            <a:avLst/>
+          </a:prstGeom>
+          <a:ln w="3600">
+            <a:solidFill>
+              <a:srgbClr val="2A2F38"/>
+            </a:solidFill>
+          </a:ln>
+        </p:spPr>
+      </p:cxnSp>
+      <p:sp>
+        <p:nvSpPr>
+          <p:cNvPr id="17" name="텍스트"/>
+          <p:cNvSpPr txBox="1"/>
+          <p:nvPr/>
+        </p:nvSpPr>
+        <p:spPr>
+          <a:xfrm>
+            <a:off x="2250000" y="684000"/>
+            <a:ext cx="630000" cy="216000"/>
+          </a:xfrm>
+          <a:prstGeom prst="rect">
+            <a:avLst/>
+          </a:prstGeom>
+          <a:noFill/>
+        </p:spPr>
+        <p:txBody>
+          <a:bodyPr wrap="square" lIns="0" rIns="0" tIns="0" bIns="0" anchor="ctr">
+            <a:spAutoFit/>
+          </a:bodyPr>
+          <a:lstStyle/>
+          <a:p>
+            <a:pPr algn="ctr">
+              <a:lnSpc>
+                <a:spcPts val="1015"/>
+              </a:lnSpc>
+            </a:pPr>
+            <a:r>
+              <a:rPr sz="700" b="1">
+                <a:solidFill>
+                  <a:srgbClr val="FFFFFF"/>
+                </a:solidFill>
+                <a:latin typeface="맑은 고딕"/>
+                <a:ea typeface="맑은 고딕"/>
+              </a:rPr>
+              <a:t>포트폴리오</a:t>
+            </a:r>
+          </a:p>
+        </p:txBody>
+      </p:sp>
+      <p:cxnSp>
+        <p:nvCxnSpPr>
+          <p:cNvPr id="18" name="Connector 17"/>
+          <p:cNvCxnSpPr/>
+          <p:nvPr/>
+        </p:nvCxnSpPr>
+        <p:spPr>
+          <a:xfrm>
+            <a:off x="2250000" y="676800"/>
+            <a:ext cx="0" cy="230400"/>
+          </a:xfrm>
+          <a:prstGeom prst="line">
+            <a:avLst/>
+          </a:prstGeom>
+          <a:ln w="3600">
+            <a:solidFill>
+              <a:srgbClr val="2A2F38"/>
+            </a:solidFill>
+          </a:ln>
+        </p:spPr>
+      </p:cxnSp>
+      <p:cxnSp>
+        <p:nvCxnSpPr>
+          <p:cNvPr id="19" name="Connector 18"/>
+          <p:cNvCxnSpPr/>
+          <p:nvPr/>
+        </p:nvCxnSpPr>
+        <p:spPr>
+          <a:xfrm>
+            <a:off x="360000" y="1159200"/>
+            <a:ext cx="2520000" cy="0"/>
+          </a:xfrm>
+          <a:prstGeom prst="line">
+            <a:avLst/>
+          </a:prstGeom>
+          <a:ln w="3600">
+            <a:solidFill>
+              <a:srgbClr val="2A2F38"/>
+            </a:solidFill>
+          </a:ln>
+        </p:spPr>
+      </p:cxnSp>
+      <p:sp>
+        <p:nvSpPr>
+          <p:cNvPr id="20" name="텍스트"/>
+          <p:cNvSpPr txBox="1"/>
+          <p:nvPr/>
+        </p:nvSpPr>
+        <p:spPr>
+          <a:xfrm>
+            <a:off x="360000" y="1245600"/>
+            <a:ext cx="1224000" cy="118111"/>
+          </a:xfrm>
+          <a:prstGeom prst="rect">
+            <a:avLst/>
+          </a:prstGeom>
+          <a:noFill/>
+        </p:spPr>
+        <p:txBody>
+          <a:bodyPr wrap="square" lIns="0" rIns="0" tIns="0" bIns="0" anchor="t">
+            <a:spAutoFit/>
+          </a:bodyPr>
+          <a:lstStyle/>
+          <a:p>
+            <a:pPr algn="ctr">
+              <a:lnSpc>
+                <a:spcPts val="899"/>
+              </a:lnSpc>
+            </a:pPr>
+            <a:r>
+              <a:rPr sz="620" b="0">
+                <a:solidFill>
+                  <a:srgbClr val="FFFFFF"/>
+                </a:solidFill>
+                <a:latin typeface="맑은 고딕"/>
+                <a:ea typeface="맑은 고딕"/>
+              </a:rPr>
+              <a:t>메일 · 메시지 문의</a:t>
+            </a:r>
+          </a:p>
+        </p:txBody>
+      </p:sp>
+      <p:sp>
+        <p:nvSpPr>
+          <p:cNvPr id="21" name="텍스트"/>
+          <p:cNvSpPr txBox="1"/>
+          <p:nvPr/>
+        </p:nvSpPr>
+        <p:spPr>
+          <a:xfrm>
+            <a:off x="1656000" y="1245600"/>
+            <a:ext cx="1224000" cy="118111"/>
+          </a:xfrm>
+          <a:prstGeom prst="rect">
+            <a:avLst/>
+          </a:prstGeom>
+          <a:noFill/>
+        </p:spPr>
+        <p:txBody>
+          <a:bodyPr wrap="square" lIns="0" rIns="0" tIns="0" bIns="0" anchor="t">
+            <a:spAutoFit/>
+          </a:bodyPr>
+          <a:lstStyle/>
+          <a:p>
+            <a:pPr algn="ctr">
+              <a:lnSpc>
+                <a:spcPts val="899"/>
+              </a:lnSpc>
+            </a:pPr>
+            <a:r>
+              <a:rPr sz="620" b="0">
+                <a:solidFill>
+                  <a:srgbClr val="FFFFFF"/>
+                </a:solidFill>
+                <a:latin typeface="맑은 고딕"/>
+                <a:ea typeface="맑은 고딕"/>
+              </a:rPr>
+              <a:t>KAKAO  @채널아이디</a:t>
+            </a:r>
+          </a:p>
+        </p:txBody>
+      </p:sp>
+      <p:sp>
+        <p:nvSpPr>
+          <p:cNvPr id="22" name="텍스트"/>
+          <p:cNvSpPr txBox="1"/>
+          <p:nvPr/>
+        </p:nvSpPr>
+        <p:spPr>
+          <a:xfrm>
+            <a:off x="360000" y="1526400"/>
             <a:ext cx="2520000" cy="123826"/>
           </a:xfrm>
           <a:prstGeom prst="rect">
@@ -3780,7 +4343,7 @@
               </a:lnSpc>
             </a:pPr>
             <a:r>
-              <a:rPr sz="650" b="1" spc="300">
+              <a:rPr sz="650" b="1" spc="220">
                 <a:solidFill>
                   <a:srgbClr val="A3A9B5"/>
                 </a:solidFill>
